--- a/assets/figures-editable/c3-c4/c3-e07.pptx
+++ b/assets/figures-editable/c3-c4/c3-e07.pptx
@@ -3104,8 +3104,8 @@
         </p:nvSpPr>
         <p:spPr>
           <a:xfrm>
-            <a:off x="274320" y="137160"/>
-            <a:ext cx="11612880" cy="365760"/>
+            <a:off x="274320" y="118872"/>
+            <a:ext cx="11612880" cy="340105"/>
           </a:xfrm>
           <a:prstGeom prst="rect">
             <a:avLst/>
@@ -3114,7 +3114,7 @@
           <a:effectLst/>
         </p:spPr>
         <p:txBody>
-          <a:bodyPr wrap="square" lIns="27432" rIns="27432" tIns="18288" bIns="18288" anchor="ctr">
+          <a:bodyPr wrap="none" lIns="18288" rIns="18288" tIns="18288" bIns="18288" anchor="t">
             <a:spAutoFit/>
           </a:bodyPr>
           <a:lstStyle/>
@@ -3125,7 +3125,7 @@
               </a:spcAft>
             </a:pPr>
             <a:r>
-              <a:rPr sz="2100" b="0" i="0">
+              <a:rPr sz="1900" b="1" i="0">
                 <a:solidFill>
                   <a:srgbClr val="8EDBD4"/>
                 </a:solidFill>
@@ -3136,23 +3136,20 @@
           </a:p>
         </p:txBody>
       </p:sp>
-      <p:sp>
-        <p:nvSpPr>
-          <p:cNvPr id="3" name="C3-E07 ellipse 1" descr="sci-ppt:o001"/>
-          <p:cNvSpPr/>
+      <p:cxnSp>
+        <p:nvCxnSpPr>
+          <p:cNvPr id="3" name="C3-E07 line 1" descr="sci-ppt:o001"/>
+          <p:cNvCxnSpPr/>
           <p:nvPr/>
-        </p:nvSpPr>
-        <p:spPr>
-          <a:xfrm>
-            <a:off x="1417319" y="1280160"/>
-            <a:ext cx="1554480" cy="1554480"/>
-          </a:xfrm>
-          <a:prstGeom prst="ellipse">
+        </p:nvCxnSpPr>
+        <p:spPr>
+          <a:xfrm>
+            <a:off x="914400" y="5029200"/>
+            <a:ext cx="6035040" cy="0"/>
+          </a:xfrm>
+          <a:prstGeom prst="line">
             <a:avLst/>
           </a:prstGeom>
-          <a:solidFill>
-            <a:srgbClr val="213E4B"/>
-          </a:solidFill>
           <a:ln w="19050">
             <a:solidFill>
               <a:srgbClr val="B4C7D2"/>
@@ -3160,31 +3157,21 @@
           </a:ln>
           <a:effectLst/>
         </p:spPr>
-        <p:txBody>
-          <a:bodyPr rtlCol="0" anchor="ctr"/>
-          <a:lstStyle/>
-          <a:p>
-            <a:pPr algn="ctr"/>
-          </a:p>
-        </p:txBody>
-      </p:sp>
-      <p:sp>
-        <p:nvSpPr>
-          <p:cNvPr id="4" name="C3-E07 ellipse 2" descr="sci-ppt:o002"/>
-          <p:cNvSpPr/>
+      </p:cxnSp>
+      <p:cxnSp>
+        <p:nvCxnSpPr>
+          <p:cNvPr id="4" name="C3-E07 line 2" descr="sci-ppt:o002"/>
+          <p:cNvCxnSpPr/>
           <p:nvPr/>
-        </p:nvSpPr>
-        <p:spPr>
-          <a:xfrm>
-            <a:off x="7909560" y="1280160"/>
-            <a:ext cx="1554480" cy="1554480"/>
-          </a:xfrm>
-          <a:prstGeom prst="ellipse">
+        </p:nvCxnSpPr>
+        <p:spPr>
+          <a:xfrm>
+            <a:off x="914400" y="1371600"/>
+            <a:ext cx="0" cy="3657600"/>
+          </a:xfrm>
+          <a:prstGeom prst="line">
             <a:avLst/>
           </a:prstGeom>
-          <a:solidFill>
-            <a:srgbClr val="213E4B"/>
-          </a:solidFill>
           <a:ln w="19050">
             <a:solidFill>
               <a:srgbClr val="B4C7D2"/>
@@ -3192,24 +3179,61 @@
           </a:ln>
           <a:effectLst/>
         </p:spPr>
-        <p:txBody>
-          <a:bodyPr rtlCol="0" anchor="ctr"/>
-          <a:lstStyle/>
-          <a:p>
-            <a:pPr algn="ctr"/>
-          </a:p>
-        </p:txBody>
-      </p:sp>
-      <p:sp>
-        <p:nvSpPr>
-          <p:cNvPr id="5" name="C3-E07 text 3" descr="sci-ppt:o003"/>
+      </p:cxnSp>
+      <p:cxnSp>
+        <p:nvCxnSpPr>
+          <p:cNvPr id="5" name="C3-E07 line 3" descr="sci-ppt:o003"/>
+          <p:cNvCxnSpPr/>
+          <p:nvPr/>
+        </p:nvCxnSpPr>
+        <p:spPr>
+          <a:xfrm>
+            <a:off x="914400" y="5029200"/>
+            <a:ext cx="0" cy="64008"/>
+          </a:xfrm>
+          <a:prstGeom prst="line">
+            <a:avLst/>
+          </a:prstGeom>
+          <a:ln w="12700">
+            <a:solidFill>
+              <a:srgbClr val="B4C7D2"/>
+            </a:solidFill>
+          </a:ln>
+          <a:effectLst/>
+        </p:spPr>
+      </p:cxnSp>
+      <p:cxnSp>
+        <p:nvCxnSpPr>
+          <p:cNvPr id="6" name="C3-E07 line 4" descr="sci-ppt:o004"/>
+          <p:cNvCxnSpPr/>
+          <p:nvPr/>
+        </p:nvCxnSpPr>
+        <p:spPr>
+          <a:xfrm>
+            <a:off x="914400" y="1371600"/>
+            <a:ext cx="0" cy="3657600"/>
+          </a:xfrm>
+          <a:prstGeom prst="line">
+            <a:avLst/>
+          </a:prstGeom>
+          <a:ln w="7620">
+            <a:solidFill>
+              <a:srgbClr val="2E4756"/>
+            </a:solidFill>
+          </a:ln>
+          <a:effectLst/>
+        </p:spPr>
+      </p:cxnSp>
+      <p:sp>
+        <p:nvSpPr>
+          <p:cNvPr id="7" name="C3-E07 text 5" descr="sci-ppt:o005"/>
           <p:cNvSpPr txBox="1"/>
           <p:nvPr/>
         </p:nvSpPr>
         <p:spPr>
           <a:xfrm>
-            <a:off x="1645920" y="1874519"/>
-            <a:ext cx="1463040" cy="365760"/>
+            <a:off x="457200" y="5111496"/>
+            <a:ext cx="914400" cy="208407"/>
           </a:xfrm>
           <a:prstGeom prst="rect">
             <a:avLst/>
@@ -3218,7 +3242,781 @@
           <a:effectLst/>
         </p:spPr>
         <p:txBody>
-          <a:bodyPr wrap="square" lIns="27432" rIns="27432" tIns="18288" bIns="18288" anchor="ctr">
+          <a:bodyPr wrap="none" lIns="18288" rIns="18288" tIns="18288" bIns="18288" anchor="t">
+            <a:spAutoFit/>
+          </a:bodyPr>
+          <a:lstStyle/>
+          <a:p>
+            <a:pPr algn="ctr">
+              <a:spcAft>
+                <a:spcPts val="0"/>
+              </a:spcAft>
+            </a:pPr>
+            <a:r>
+              <a:rPr sz="1050" b="0" i="0">
+                <a:solidFill>
+                  <a:srgbClr val="B4C7D2"/>
+                </a:solidFill>
+                <a:latin typeface="Arial"/>
+              </a:rPr>
+              <a:t>0</a:t>
+            </a:r>
+          </a:p>
+        </p:txBody>
+      </p:sp>
+      <p:cxnSp>
+        <p:nvCxnSpPr>
+          <p:cNvPr id="8" name="C3-E07 line 6" descr="sci-ppt:o006"/>
+          <p:cNvCxnSpPr/>
+          <p:nvPr/>
+        </p:nvCxnSpPr>
+        <p:spPr>
+          <a:xfrm>
+            <a:off x="2255520" y="5029200"/>
+            <a:ext cx="0" cy="64008"/>
+          </a:xfrm>
+          <a:prstGeom prst="line">
+            <a:avLst/>
+          </a:prstGeom>
+          <a:ln w="12700">
+            <a:solidFill>
+              <a:srgbClr val="B4C7D2"/>
+            </a:solidFill>
+          </a:ln>
+          <a:effectLst/>
+        </p:spPr>
+      </p:cxnSp>
+      <p:cxnSp>
+        <p:nvCxnSpPr>
+          <p:cNvPr id="9" name="C3-E07 line 7" descr="sci-ppt:o007"/>
+          <p:cNvCxnSpPr/>
+          <p:nvPr/>
+        </p:nvCxnSpPr>
+        <p:spPr>
+          <a:xfrm>
+            <a:off x="2255520" y="1371600"/>
+            <a:ext cx="0" cy="3657600"/>
+          </a:xfrm>
+          <a:prstGeom prst="line">
+            <a:avLst/>
+          </a:prstGeom>
+          <a:ln w="7620">
+            <a:solidFill>
+              <a:srgbClr val="2E4756"/>
+            </a:solidFill>
+          </a:ln>
+          <a:effectLst/>
+        </p:spPr>
+      </p:cxnSp>
+      <p:sp>
+        <p:nvSpPr>
+          <p:cNvPr id="10" name="C3-E07 text 8" descr="sci-ppt:o008"/>
+          <p:cNvSpPr txBox="1"/>
+          <p:nvPr/>
+        </p:nvSpPr>
+        <p:spPr>
+          <a:xfrm>
+            <a:off x="1798320" y="5111496"/>
+            <a:ext cx="914400" cy="208407"/>
+          </a:xfrm>
+          <a:prstGeom prst="rect">
+            <a:avLst/>
+          </a:prstGeom>
+          <a:noFill/>
+          <a:effectLst/>
+        </p:spPr>
+        <p:txBody>
+          <a:bodyPr wrap="none" lIns="18288" rIns="18288" tIns="18288" bIns="18288" anchor="t">
+            <a:spAutoFit/>
+          </a:bodyPr>
+          <a:lstStyle/>
+          <a:p>
+            <a:pPr algn="ctr">
+              <a:spcAft>
+                <a:spcPts val="0"/>
+              </a:spcAft>
+            </a:pPr>
+            <a:r>
+              <a:rPr sz="1050" b="0" i="0">
+                <a:solidFill>
+                  <a:srgbClr val="B4C7D2"/>
+                </a:solidFill>
+                <a:latin typeface="Arial"/>
+              </a:rPr>
+              <a:t>1</a:t>
+            </a:r>
+          </a:p>
+        </p:txBody>
+      </p:sp>
+      <p:cxnSp>
+        <p:nvCxnSpPr>
+          <p:cNvPr id="11" name="C3-E07 line 9" descr="sci-ppt:o009"/>
+          <p:cNvCxnSpPr/>
+          <p:nvPr/>
+        </p:nvCxnSpPr>
+        <p:spPr>
+          <a:xfrm>
+            <a:off x="3596640" y="5029200"/>
+            <a:ext cx="0" cy="64008"/>
+          </a:xfrm>
+          <a:prstGeom prst="line">
+            <a:avLst/>
+          </a:prstGeom>
+          <a:ln w="12700">
+            <a:solidFill>
+              <a:srgbClr val="B4C7D2"/>
+            </a:solidFill>
+          </a:ln>
+          <a:effectLst/>
+        </p:spPr>
+      </p:cxnSp>
+      <p:cxnSp>
+        <p:nvCxnSpPr>
+          <p:cNvPr id="12" name="C3-E07 line 10" descr="sci-ppt:o010"/>
+          <p:cNvCxnSpPr/>
+          <p:nvPr/>
+        </p:nvCxnSpPr>
+        <p:spPr>
+          <a:xfrm>
+            <a:off x="3596640" y="1371600"/>
+            <a:ext cx="0" cy="3657600"/>
+          </a:xfrm>
+          <a:prstGeom prst="line">
+            <a:avLst/>
+          </a:prstGeom>
+          <a:ln w="7620">
+            <a:solidFill>
+              <a:srgbClr val="2E4756"/>
+            </a:solidFill>
+          </a:ln>
+          <a:effectLst/>
+        </p:spPr>
+      </p:cxnSp>
+      <p:sp>
+        <p:nvSpPr>
+          <p:cNvPr id="13" name="C3-E07 text 11" descr="sci-ppt:o011"/>
+          <p:cNvSpPr txBox="1"/>
+          <p:nvPr/>
+        </p:nvSpPr>
+        <p:spPr>
+          <a:xfrm>
+            <a:off x="3139440" y="5111496"/>
+            <a:ext cx="914400" cy="208407"/>
+          </a:xfrm>
+          <a:prstGeom prst="rect">
+            <a:avLst/>
+          </a:prstGeom>
+          <a:noFill/>
+          <a:effectLst/>
+        </p:spPr>
+        <p:txBody>
+          <a:bodyPr wrap="none" lIns="18288" rIns="18288" tIns="18288" bIns="18288" anchor="t">
+            <a:spAutoFit/>
+          </a:bodyPr>
+          <a:lstStyle/>
+          <a:p>
+            <a:pPr algn="ctr">
+              <a:spcAft>
+                <a:spcPts val="0"/>
+              </a:spcAft>
+            </a:pPr>
+            <a:r>
+              <a:rPr sz="1050" b="0" i="0">
+                <a:solidFill>
+                  <a:srgbClr val="B4C7D2"/>
+                </a:solidFill>
+                <a:latin typeface="Arial"/>
+              </a:rPr>
+              <a:t>2</a:t>
+            </a:r>
+          </a:p>
+        </p:txBody>
+      </p:sp>
+      <p:cxnSp>
+        <p:nvCxnSpPr>
+          <p:cNvPr id="14" name="C3-E07 line 12" descr="sci-ppt:o012"/>
+          <p:cNvCxnSpPr/>
+          <p:nvPr/>
+        </p:nvCxnSpPr>
+        <p:spPr>
+          <a:xfrm>
+            <a:off x="4937759" y="5029200"/>
+            <a:ext cx="0" cy="64008"/>
+          </a:xfrm>
+          <a:prstGeom prst="line">
+            <a:avLst/>
+          </a:prstGeom>
+          <a:ln w="12700">
+            <a:solidFill>
+              <a:srgbClr val="B4C7D2"/>
+            </a:solidFill>
+          </a:ln>
+          <a:effectLst/>
+        </p:spPr>
+      </p:cxnSp>
+      <p:cxnSp>
+        <p:nvCxnSpPr>
+          <p:cNvPr id="15" name="C3-E07 line 13" descr="sci-ppt:o013"/>
+          <p:cNvCxnSpPr/>
+          <p:nvPr/>
+        </p:nvCxnSpPr>
+        <p:spPr>
+          <a:xfrm>
+            <a:off x="4937759" y="1371600"/>
+            <a:ext cx="0" cy="3657600"/>
+          </a:xfrm>
+          <a:prstGeom prst="line">
+            <a:avLst/>
+          </a:prstGeom>
+          <a:ln w="7620">
+            <a:solidFill>
+              <a:srgbClr val="2E4756"/>
+            </a:solidFill>
+          </a:ln>
+          <a:effectLst/>
+        </p:spPr>
+      </p:cxnSp>
+      <p:sp>
+        <p:nvSpPr>
+          <p:cNvPr id="16" name="C3-E07 text 14" descr="sci-ppt:o014"/>
+          <p:cNvSpPr txBox="1"/>
+          <p:nvPr/>
+        </p:nvSpPr>
+        <p:spPr>
+          <a:xfrm>
+            <a:off x="4480559" y="5111496"/>
+            <a:ext cx="914400" cy="208407"/>
+          </a:xfrm>
+          <a:prstGeom prst="rect">
+            <a:avLst/>
+          </a:prstGeom>
+          <a:noFill/>
+          <a:effectLst/>
+        </p:spPr>
+        <p:txBody>
+          <a:bodyPr wrap="none" lIns="18288" rIns="18288" tIns="18288" bIns="18288" anchor="t">
+            <a:spAutoFit/>
+          </a:bodyPr>
+          <a:lstStyle/>
+          <a:p>
+            <a:pPr algn="ctr">
+              <a:spcAft>
+                <a:spcPts val="0"/>
+              </a:spcAft>
+            </a:pPr>
+            <a:r>
+              <a:rPr sz="1050" b="0" i="0">
+                <a:solidFill>
+                  <a:srgbClr val="B4C7D2"/>
+                </a:solidFill>
+                <a:latin typeface="Arial"/>
+              </a:rPr>
+              <a:t>3</a:t>
+            </a:r>
+          </a:p>
+        </p:txBody>
+      </p:sp>
+      <p:cxnSp>
+        <p:nvCxnSpPr>
+          <p:cNvPr id="17" name="C3-E07 line 15" descr="sci-ppt:o015"/>
+          <p:cNvCxnSpPr/>
+          <p:nvPr/>
+        </p:nvCxnSpPr>
+        <p:spPr>
+          <a:xfrm>
+            <a:off x="6278880" y="5029200"/>
+            <a:ext cx="0" cy="64008"/>
+          </a:xfrm>
+          <a:prstGeom prst="line">
+            <a:avLst/>
+          </a:prstGeom>
+          <a:ln w="12700">
+            <a:solidFill>
+              <a:srgbClr val="B4C7D2"/>
+            </a:solidFill>
+          </a:ln>
+          <a:effectLst/>
+        </p:spPr>
+      </p:cxnSp>
+      <p:cxnSp>
+        <p:nvCxnSpPr>
+          <p:cNvPr id="18" name="C3-E07 line 16" descr="sci-ppt:o016"/>
+          <p:cNvCxnSpPr/>
+          <p:nvPr/>
+        </p:nvCxnSpPr>
+        <p:spPr>
+          <a:xfrm>
+            <a:off x="6278880" y="1371600"/>
+            <a:ext cx="0" cy="3657600"/>
+          </a:xfrm>
+          <a:prstGeom prst="line">
+            <a:avLst/>
+          </a:prstGeom>
+          <a:ln w="7620">
+            <a:solidFill>
+              <a:srgbClr val="2E4756"/>
+            </a:solidFill>
+          </a:ln>
+          <a:effectLst/>
+        </p:spPr>
+      </p:cxnSp>
+      <p:sp>
+        <p:nvSpPr>
+          <p:cNvPr id="19" name="C3-E07 text 17" descr="sci-ppt:o017"/>
+          <p:cNvSpPr txBox="1"/>
+          <p:nvPr/>
+        </p:nvSpPr>
+        <p:spPr>
+          <a:xfrm>
+            <a:off x="5821680" y="5111496"/>
+            <a:ext cx="914400" cy="208407"/>
+          </a:xfrm>
+          <a:prstGeom prst="rect">
+            <a:avLst/>
+          </a:prstGeom>
+          <a:noFill/>
+          <a:effectLst/>
+        </p:spPr>
+        <p:txBody>
+          <a:bodyPr wrap="none" lIns="18288" rIns="18288" tIns="18288" bIns="18288" anchor="t">
+            <a:spAutoFit/>
+          </a:bodyPr>
+          <a:lstStyle/>
+          <a:p>
+            <a:pPr algn="ctr">
+              <a:spcAft>
+                <a:spcPts val="0"/>
+              </a:spcAft>
+            </a:pPr>
+            <a:r>
+              <a:rPr sz="1050" b="0" i="0">
+                <a:solidFill>
+                  <a:srgbClr val="B4C7D2"/>
+                </a:solidFill>
+                <a:latin typeface="Arial"/>
+              </a:rPr>
+              <a:t>4</a:t>
+            </a:r>
+          </a:p>
+        </p:txBody>
+      </p:sp>
+      <p:cxnSp>
+        <p:nvCxnSpPr>
+          <p:cNvPr id="20" name="C3-E07 line 18" descr="sci-ppt:o018"/>
+          <p:cNvCxnSpPr/>
+          <p:nvPr/>
+        </p:nvCxnSpPr>
+        <p:spPr>
+          <a:xfrm>
+            <a:off x="850392" y="5029200"/>
+            <a:ext cx="64008" cy="0"/>
+          </a:xfrm>
+          <a:prstGeom prst="line">
+            <a:avLst/>
+          </a:prstGeom>
+          <a:ln w="12700">
+            <a:solidFill>
+              <a:srgbClr val="B4C7D2"/>
+            </a:solidFill>
+          </a:ln>
+          <a:effectLst/>
+        </p:spPr>
+      </p:cxnSp>
+      <p:cxnSp>
+        <p:nvCxnSpPr>
+          <p:cNvPr id="21" name="C3-E07 line 19" descr="sci-ppt:o019"/>
+          <p:cNvCxnSpPr/>
+          <p:nvPr/>
+        </p:nvCxnSpPr>
+        <p:spPr>
+          <a:xfrm>
+            <a:off x="850392" y="4158342"/>
+            <a:ext cx="64008" cy="0"/>
+          </a:xfrm>
+          <a:prstGeom prst="line">
+            <a:avLst/>
+          </a:prstGeom>
+          <a:ln w="12700">
+            <a:solidFill>
+              <a:srgbClr val="B4C7D2"/>
+            </a:solidFill>
+          </a:ln>
+          <a:effectLst/>
+        </p:spPr>
+      </p:cxnSp>
+      <p:cxnSp>
+        <p:nvCxnSpPr>
+          <p:cNvPr id="22" name="C3-E07 line 20" descr="sci-ppt:o020"/>
+          <p:cNvCxnSpPr/>
+          <p:nvPr/>
+        </p:nvCxnSpPr>
+        <p:spPr>
+          <a:xfrm>
+            <a:off x="914400" y="4158342"/>
+            <a:ext cx="6035040" cy="0"/>
+          </a:xfrm>
+          <a:prstGeom prst="line">
+            <a:avLst/>
+          </a:prstGeom>
+          <a:ln w="7620">
+            <a:solidFill>
+              <a:srgbClr val="2E4756"/>
+            </a:solidFill>
+          </a:ln>
+          <a:effectLst/>
+        </p:spPr>
+      </p:cxnSp>
+      <p:sp>
+        <p:nvSpPr>
+          <p:cNvPr id="23" name="C3-E07 text 21" descr="sci-ppt:o021"/>
+          <p:cNvSpPr txBox="1"/>
+          <p:nvPr/>
+        </p:nvSpPr>
+        <p:spPr>
+          <a:xfrm>
+            <a:off x="45720" y="4076046"/>
+            <a:ext cx="777240" cy="208407"/>
+          </a:xfrm>
+          <a:prstGeom prst="rect">
+            <a:avLst/>
+          </a:prstGeom>
+          <a:noFill/>
+          <a:effectLst/>
+        </p:spPr>
+        <p:txBody>
+          <a:bodyPr wrap="none" lIns="18288" rIns="18288" tIns="18288" bIns="18288" anchor="t">
+            <a:spAutoFit/>
+          </a:bodyPr>
+          <a:lstStyle/>
+          <a:p>
+            <a:pPr algn="r">
+              <a:spcAft>
+                <a:spcPts val="0"/>
+              </a:spcAft>
+            </a:pPr>
+            <a:r>
+              <a:rPr sz="1050" b="0" i="0">
+                <a:solidFill>
+                  <a:srgbClr val="B4C7D2"/>
+                </a:solidFill>
+                <a:latin typeface="Arial"/>
+              </a:rPr>
+              <a:t>0.25</a:t>
+            </a:r>
+          </a:p>
+        </p:txBody>
+      </p:sp>
+      <p:cxnSp>
+        <p:nvCxnSpPr>
+          <p:cNvPr id="24" name="C3-E07 line 22" descr="sci-ppt:o022"/>
+          <p:cNvCxnSpPr/>
+          <p:nvPr/>
+        </p:nvCxnSpPr>
+        <p:spPr>
+          <a:xfrm>
+            <a:off x="850392" y="3287485"/>
+            <a:ext cx="64008" cy="0"/>
+          </a:xfrm>
+          <a:prstGeom prst="line">
+            <a:avLst/>
+          </a:prstGeom>
+          <a:ln w="12700">
+            <a:solidFill>
+              <a:srgbClr val="B4C7D2"/>
+            </a:solidFill>
+          </a:ln>
+          <a:effectLst/>
+        </p:spPr>
+      </p:cxnSp>
+      <p:cxnSp>
+        <p:nvCxnSpPr>
+          <p:cNvPr id="25" name="C3-E07 line 23" descr="sci-ppt:o023"/>
+          <p:cNvCxnSpPr/>
+          <p:nvPr/>
+        </p:nvCxnSpPr>
+        <p:spPr>
+          <a:xfrm>
+            <a:off x="914400" y="3287485"/>
+            <a:ext cx="6035040" cy="0"/>
+          </a:xfrm>
+          <a:prstGeom prst="line">
+            <a:avLst/>
+          </a:prstGeom>
+          <a:ln w="7620">
+            <a:solidFill>
+              <a:srgbClr val="2E4756"/>
+            </a:solidFill>
+          </a:ln>
+          <a:effectLst/>
+        </p:spPr>
+      </p:cxnSp>
+      <p:sp>
+        <p:nvSpPr>
+          <p:cNvPr id="26" name="C3-E07 text 24" descr="sci-ppt:o024"/>
+          <p:cNvSpPr txBox="1"/>
+          <p:nvPr/>
+        </p:nvSpPr>
+        <p:spPr>
+          <a:xfrm>
+            <a:off x="45720" y="3205189"/>
+            <a:ext cx="777240" cy="208407"/>
+          </a:xfrm>
+          <a:prstGeom prst="rect">
+            <a:avLst/>
+          </a:prstGeom>
+          <a:noFill/>
+          <a:effectLst/>
+        </p:spPr>
+        <p:txBody>
+          <a:bodyPr wrap="none" lIns="18288" rIns="18288" tIns="18288" bIns="18288" anchor="t">
+            <a:spAutoFit/>
+          </a:bodyPr>
+          <a:lstStyle/>
+          <a:p>
+            <a:pPr algn="r">
+              <a:spcAft>
+                <a:spcPts val="0"/>
+              </a:spcAft>
+            </a:pPr>
+            <a:r>
+              <a:rPr sz="1050" b="0" i="0">
+                <a:solidFill>
+                  <a:srgbClr val="B4C7D2"/>
+                </a:solidFill>
+                <a:latin typeface="Arial"/>
+              </a:rPr>
+              <a:t>0.50</a:t>
+            </a:r>
+          </a:p>
+        </p:txBody>
+      </p:sp>
+      <p:cxnSp>
+        <p:nvCxnSpPr>
+          <p:cNvPr id="27" name="C3-E07 line 25" descr="sci-ppt:o025"/>
+          <p:cNvCxnSpPr/>
+          <p:nvPr/>
+        </p:nvCxnSpPr>
+        <p:spPr>
+          <a:xfrm>
+            <a:off x="850392" y="2416628"/>
+            <a:ext cx="64008" cy="0"/>
+          </a:xfrm>
+          <a:prstGeom prst="line">
+            <a:avLst/>
+          </a:prstGeom>
+          <a:ln w="12700">
+            <a:solidFill>
+              <a:srgbClr val="B4C7D2"/>
+            </a:solidFill>
+          </a:ln>
+          <a:effectLst/>
+        </p:spPr>
+      </p:cxnSp>
+      <p:cxnSp>
+        <p:nvCxnSpPr>
+          <p:cNvPr id="28" name="C3-E07 line 26" descr="sci-ppt:o026"/>
+          <p:cNvCxnSpPr/>
+          <p:nvPr/>
+        </p:nvCxnSpPr>
+        <p:spPr>
+          <a:xfrm>
+            <a:off x="914400" y="2416628"/>
+            <a:ext cx="6035040" cy="0"/>
+          </a:xfrm>
+          <a:prstGeom prst="line">
+            <a:avLst/>
+          </a:prstGeom>
+          <a:ln w="7620">
+            <a:solidFill>
+              <a:srgbClr val="2E4756"/>
+            </a:solidFill>
+          </a:ln>
+          <a:effectLst/>
+        </p:spPr>
+      </p:cxnSp>
+      <p:sp>
+        <p:nvSpPr>
+          <p:cNvPr id="29" name="C3-E07 text 27" descr="sci-ppt:o027"/>
+          <p:cNvSpPr txBox="1"/>
+          <p:nvPr/>
+        </p:nvSpPr>
+        <p:spPr>
+          <a:xfrm>
+            <a:off x="45720" y="2334332"/>
+            <a:ext cx="777240" cy="208407"/>
+          </a:xfrm>
+          <a:prstGeom prst="rect">
+            <a:avLst/>
+          </a:prstGeom>
+          <a:noFill/>
+          <a:effectLst/>
+        </p:spPr>
+        <p:txBody>
+          <a:bodyPr wrap="none" lIns="18288" rIns="18288" tIns="18288" bIns="18288" anchor="t">
+            <a:spAutoFit/>
+          </a:bodyPr>
+          <a:lstStyle/>
+          <a:p>
+            <a:pPr algn="r">
+              <a:spcAft>
+                <a:spcPts val="0"/>
+              </a:spcAft>
+            </a:pPr>
+            <a:r>
+              <a:rPr sz="1050" b="0" i="0">
+                <a:solidFill>
+                  <a:srgbClr val="B4C7D2"/>
+                </a:solidFill>
+                <a:latin typeface="Arial"/>
+              </a:rPr>
+              <a:t>0.75</a:t>
+            </a:r>
+          </a:p>
+        </p:txBody>
+      </p:sp>
+      <p:cxnSp>
+        <p:nvCxnSpPr>
+          <p:cNvPr id="30" name="C3-E07 line 28" descr="sci-ppt:o028"/>
+          <p:cNvCxnSpPr/>
+          <p:nvPr/>
+        </p:nvCxnSpPr>
+        <p:spPr>
+          <a:xfrm>
+            <a:off x="850392" y="1545771"/>
+            <a:ext cx="64008" cy="0"/>
+          </a:xfrm>
+          <a:prstGeom prst="line">
+            <a:avLst/>
+          </a:prstGeom>
+          <a:ln w="12700">
+            <a:solidFill>
+              <a:srgbClr val="B4C7D2"/>
+            </a:solidFill>
+          </a:ln>
+          <a:effectLst/>
+        </p:spPr>
+      </p:cxnSp>
+      <p:cxnSp>
+        <p:nvCxnSpPr>
+          <p:cNvPr id="31" name="C3-E07 line 29" descr="sci-ppt:o029"/>
+          <p:cNvCxnSpPr/>
+          <p:nvPr/>
+        </p:nvCxnSpPr>
+        <p:spPr>
+          <a:xfrm>
+            <a:off x="914400" y="1545771"/>
+            <a:ext cx="6035040" cy="0"/>
+          </a:xfrm>
+          <a:prstGeom prst="line">
+            <a:avLst/>
+          </a:prstGeom>
+          <a:ln w="7620">
+            <a:solidFill>
+              <a:srgbClr val="2E4756"/>
+            </a:solidFill>
+          </a:ln>
+          <a:effectLst/>
+        </p:spPr>
+      </p:cxnSp>
+      <p:sp>
+        <p:nvSpPr>
+          <p:cNvPr id="32" name="C3-E07 text 30" descr="sci-ppt:o030"/>
+          <p:cNvSpPr txBox="1"/>
+          <p:nvPr/>
+        </p:nvSpPr>
+        <p:spPr>
+          <a:xfrm>
+            <a:off x="45720" y="1463475"/>
+            <a:ext cx="777240" cy="208407"/>
+          </a:xfrm>
+          <a:prstGeom prst="rect">
+            <a:avLst/>
+          </a:prstGeom>
+          <a:noFill/>
+          <a:effectLst/>
+        </p:spPr>
+        <p:txBody>
+          <a:bodyPr wrap="none" lIns="18288" rIns="18288" tIns="18288" bIns="18288" anchor="t">
+            <a:spAutoFit/>
+          </a:bodyPr>
+          <a:lstStyle/>
+          <a:p>
+            <a:pPr algn="r">
+              <a:spcAft>
+                <a:spcPts val="0"/>
+              </a:spcAft>
+            </a:pPr>
+            <a:r>
+              <a:rPr sz="1050" b="0" i="0">
+                <a:solidFill>
+                  <a:srgbClr val="B4C7D2"/>
+                </a:solidFill>
+                <a:latin typeface="Arial"/>
+              </a:rPr>
+              <a:t>1.00</a:t>
+            </a:r>
+          </a:p>
+        </p:txBody>
+      </p:sp>
+      <p:sp>
+        <p:nvSpPr>
+          <p:cNvPr id="33" name="C3-E07 text 31" descr="sci-ppt:o031"/>
+          <p:cNvSpPr txBox="1"/>
+          <p:nvPr/>
+        </p:nvSpPr>
+        <p:spPr>
+          <a:xfrm>
+            <a:off x="914400" y="5312664"/>
+            <a:ext cx="6035040" cy="231648"/>
+          </a:xfrm>
+          <a:prstGeom prst="rect">
+            <a:avLst/>
+          </a:prstGeom>
+          <a:noFill/>
+          <a:effectLst/>
+        </p:spPr>
+        <p:txBody>
+          <a:bodyPr wrap="none" lIns="18288" rIns="18288" tIns="18288" bIns="18288" anchor="t">
+            <a:spAutoFit/>
+          </a:bodyPr>
+          <a:lstStyle/>
+          <a:p>
+            <a:pPr algn="ctr">
+              <a:spcAft>
+                <a:spcPts val="0"/>
+              </a:spcAft>
+            </a:pPr>
+            <a:r>
+              <a:rPr sz="1200" b="0" i="0">
+                <a:solidFill>
+                  <a:srgbClr val="E7F0F3"/>
+                </a:solidFill>
+                <a:latin typeface="Arial"/>
+              </a:rPr>
+              <a:t>t  (µs)</a:t>
+            </a:r>
+          </a:p>
+        </p:txBody>
+      </p:sp>
+      <p:sp>
+        <p:nvSpPr>
+          <p:cNvPr id="34" name="C3-E07 text 32" descr="sci-ppt:o032"/>
+          <p:cNvSpPr txBox="1"/>
+          <p:nvPr/>
+        </p:nvSpPr>
+        <p:spPr>
+          <a:xfrm>
+            <a:off x="365760" y="1024128"/>
+            <a:ext cx="6035040" cy="231648"/>
+          </a:xfrm>
+          <a:prstGeom prst="rect">
+            <a:avLst/>
+          </a:prstGeom>
+          <a:noFill/>
+          <a:effectLst/>
+        </p:spPr>
+        <p:txBody>
+          <a:bodyPr wrap="none" lIns="18288" rIns="18288" tIns="18288" bIns="18288" anchor="t">
             <a:spAutoFit/>
           </a:bodyPr>
           <a:lstStyle/>
@@ -3229,27 +4027,1706 @@
               </a:spcAft>
             </a:pPr>
             <a:r>
-              <a:rPr sz="1700" b="0" i="0">
+              <a:rPr sz="1200" b="0" i="0">
                 <a:solidFill>
                   <a:srgbClr val="E7F0F3"/>
                 </a:solidFill>
                 <a:latin typeface="Arial"/>
               </a:rPr>
-              <a:t>j: source</a:t>
-            </a:r>
-          </a:p>
-        </p:txBody>
-      </p:sp>
-      <p:sp>
-        <p:nvSpPr>
-          <p:cNvPr id="6" name="C3-E07 text 4" descr="sci-ppt:o004"/>
+              <a:t>R / Rₘₐₓ</a:t>
+            </a:r>
+          </a:p>
+        </p:txBody>
+      </p:sp>
+      <p:sp>
+        <p:nvSpPr>
+          <p:cNvPr id="35" name="C3-E07 polygon 33" descr="sci-ppt:o033"/>
+          <p:cNvSpPr/>
+          <p:nvPr/>
+        </p:nvSpPr>
+        <p:spPr>
+          <a:xfrm>
+            <a:off x="914400" y="1545771"/>
+            <a:ext cx="3678909" cy="3304248"/>
+          </a:xfrm>
+          <a:custGeom>
+            <a:avLst/>
+            <a:gdLst/>
+            <a:ahLst/>
+            <a:cxnLst/>
+            <a:rect l="l" t="t" r="r" b="b"/>
+            <a:pathLst>
+              <a:path w="3678909" h="3304248">
+                <a:moveTo>
+                  <a:pt x="0" y="0"/>
+                </a:moveTo>
+                <a:lnTo>
+                  <a:pt x="21472" y="50"/>
+                </a:lnTo>
+                <a:lnTo>
+                  <a:pt x="42944" y="198"/>
+                </a:lnTo>
+                <a:lnTo>
+                  <a:pt x="64416" y="446"/>
+                </a:lnTo>
+                <a:lnTo>
+                  <a:pt x="85888" y="794"/>
+                </a:lnTo>
+                <a:lnTo>
+                  <a:pt x="107361" y="1240"/>
+                </a:lnTo>
+                <a:lnTo>
+                  <a:pt x="128833" y="1786"/>
+                </a:lnTo>
+                <a:lnTo>
+                  <a:pt x="150305" y="2432"/>
+                </a:lnTo>
+                <a:lnTo>
+                  <a:pt x="171777" y="3177"/>
+                </a:lnTo>
+                <a:lnTo>
+                  <a:pt x="193250" y="4021"/>
+                </a:lnTo>
+                <a:lnTo>
+                  <a:pt x="214722" y="4965"/>
+                </a:lnTo>
+                <a:lnTo>
+                  <a:pt x="236194" y="6009"/>
+                </a:lnTo>
+                <a:lnTo>
+                  <a:pt x="257666" y="7153"/>
+                </a:lnTo>
+                <a:lnTo>
+                  <a:pt x="279139" y="8397"/>
+                </a:lnTo>
+                <a:lnTo>
+                  <a:pt x="300611" y="9741"/>
+                </a:lnTo>
+                <a:lnTo>
+                  <a:pt x="322083" y="11186"/>
+                </a:lnTo>
+                <a:lnTo>
+                  <a:pt x="343555" y="12731"/>
+                </a:lnTo>
+                <a:lnTo>
+                  <a:pt x="365027" y="14376"/>
+                </a:lnTo>
+                <a:lnTo>
+                  <a:pt x="386500" y="16123"/>
+                </a:lnTo>
+                <a:lnTo>
+                  <a:pt x="407972" y="17970"/>
+                </a:lnTo>
+                <a:lnTo>
+                  <a:pt x="429444" y="19919"/>
+                </a:lnTo>
+                <a:lnTo>
+                  <a:pt x="450916" y="21969"/>
+                </a:lnTo>
+                <a:lnTo>
+                  <a:pt x="472389" y="24122"/>
+                </a:lnTo>
+                <a:lnTo>
+                  <a:pt x="493861" y="26376"/>
+                </a:lnTo>
+                <a:lnTo>
+                  <a:pt x="515333" y="28732"/>
+                </a:lnTo>
+                <a:lnTo>
+                  <a:pt x="536805" y="31191"/>
+                </a:lnTo>
+                <a:lnTo>
+                  <a:pt x="558278" y="33753"/>
+                </a:lnTo>
+                <a:lnTo>
+                  <a:pt x="579750" y="36418"/>
+                </a:lnTo>
+                <a:lnTo>
+                  <a:pt x="601222" y="39186"/>
+                </a:lnTo>
+                <a:lnTo>
+                  <a:pt x="622694" y="42059"/>
+                </a:lnTo>
+                <a:lnTo>
+                  <a:pt x="644167" y="45035"/>
+                </a:lnTo>
+                <a:lnTo>
+                  <a:pt x="665639" y="48116"/>
+                </a:lnTo>
+                <a:lnTo>
+                  <a:pt x="687111" y="51302"/>
+                </a:lnTo>
+                <a:lnTo>
+                  <a:pt x="708583" y="54593"/>
+                </a:lnTo>
+                <a:lnTo>
+                  <a:pt x="730055" y="57990"/>
+                </a:lnTo>
+                <a:lnTo>
+                  <a:pt x="751528" y="61493"/>
+                </a:lnTo>
+                <a:lnTo>
+                  <a:pt x="773000" y="65102"/>
+                </a:lnTo>
+                <a:lnTo>
+                  <a:pt x="794472" y="68819"/>
+                </a:lnTo>
+                <a:lnTo>
+                  <a:pt x="815944" y="72643"/>
+                </a:lnTo>
+                <a:lnTo>
+                  <a:pt x="837417" y="76575"/>
+                </a:lnTo>
+                <a:lnTo>
+                  <a:pt x="858889" y="80615"/>
+                </a:lnTo>
+                <a:lnTo>
+                  <a:pt x="880361" y="84764"/>
+                </a:lnTo>
+                <a:lnTo>
+                  <a:pt x="901833" y="89023"/>
+                </a:lnTo>
+                <a:lnTo>
+                  <a:pt x="923306" y="93392"/>
+                </a:lnTo>
+                <a:lnTo>
+                  <a:pt x="944778" y="97871"/>
+                </a:lnTo>
+                <a:lnTo>
+                  <a:pt x="966250" y="102462"/>
+                </a:lnTo>
+                <a:lnTo>
+                  <a:pt x="987722" y="107164"/>
+                </a:lnTo>
+                <a:lnTo>
+                  <a:pt x="1009195" y="111979"/>
+                </a:lnTo>
+                <a:lnTo>
+                  <a:pt x="1030667" y="116907"/>
+                </a:lnTo>
+                <a:lnTo>
+                  <a:pt x="1052139" y="121949"/>
+                </a:lnTo>
+                <a:lnTo>
+                  <a:pt x="1073611" y="127105"/>
+                </a:lnTo>
+                <a:lnTo>
+                  <a:pt x="1095083" y="132376"/>
+                </a:lnTo>
+                <a:lnTo>
+                  <a:pt x="1116556" y="137763"/>
+                </a:lnTo>
+                <a:lnTo>
+                  <a:pt x="1138028" y="143267"/>
+                </a:lnTo>
+                <a:lnTo>
+                  <a:pt x="1159500" y="148888"/>
+                </a:lnTo>
+                <a:lnTo>
+                  <a:pt x="1180972" y="154627"/>
+                </a:lnTo>
+                <a:lnTo>
+                  <a:pt x="1202445" y="160485"/>
+                </a:lnTo>
+                <a:lnTo>
+                  <a:pt x="1223917" y="166463"/>
+                </a:lnTo>
+                <a:lnTo>
+                  <a:pt x="1245389" y="172562"/>
+                </a:lnTo>
+                <a:lnTo>
+                  <a:pt x="1266861" y="178782"/>
+                </a:lnTo>
+                <a:lnTo>
+                  <a:pt x="1288334" y="185125"/>
+                </a:lnTo>
+                <a:lnTo>
+                  <a:pt x="1309806" y="191591"/>
+                </a:lnTo>
+                <a:lnTo>
+                  <a:pt x="1331278" y="198181"/>
+                </a:lnTo>
+                <a:lnTo>
+                  <a:pt x="1352750" y="204897"/>
+                </a:lnTo>
+                <a:lnTo>
+                  <a:pt x="1374223" y="211740"/>
+                </a:lnTo>
+                <a:lnTo>
+                  <a:pt x="1395695" y="218710"/>
+                </a:lnTo>
+                <a:lnTo>
+                  <a:pt x="1417167" y="225808"/>
+                </a:lnTo>
+                <a:lnTo>
+                  <a:pt x="1438639" y="233036"/>
+                </a:lnTo>
+                <a:lnTo>
+                  <a:pt x="1460111" y="240396"/>
+                </a:lnTo>
+                <a:lnTo>
+                  <a:pt x="1481584" y="247887"/>
+                </a:lnTo>
+                <a:lnTo>
+                  <a:pt x="1503056" y="255511"/>
+                </a:lnTo>
+                <a:lnTo>
+                  <a:pt x="1524528" y="263270"/>
+                </a:lnTo>
+                <a:lnTo>
+                  <a:pt x="1546000" y="271165"/>
+                </a:lnTo>
+                <a:lnTo>
+                  <a:pt x="1567473" y="279198"/>
+                </a:lnTo>
+                <a:lnTo>
+                  <a:pt x="1588945" y="287368"/>
+                </a:lnTo>
+                <a:lnTo>
+                  <a:pt x="1610417" y="295679"/>
+                </a:lnTo>
+                <a:lnTo>
+                  <a:pt x="1631889" y="304131"/>
+                </a:lnTo>
+                <a:lnTo>
+                  <a:pt x="1653362" y="312727"/>
+                </a:lnTo>
+                <a:lnTo>
+                  <a:pt x="1674834" y="321466"/>
+                </a:lnTo>
+                <a:lnTo>
+                  <a:pt x="1696306" y="330352"/>
+                </a:lnTo>
+                <a:lnTo>
+                  <a:pt x="1717778" y="339386"/>
+                </a:lnTo>
+                <a:lnTo>
+                  <a:pt x="1739251" y="348569"/>
+                </a:lnTo>
+                <a:lnTo>
+                  <a:pt x="1760723" y="357904"/>
+                </a:lnTo>
+                <a:lnTo>
+                  <a:pt x="1782195" y="367391"/>
+                </a:lnTo>
+                <a:lnTo>
+                  <a:pt x="1803667" y="377034"/>
+                </a:lnTo>
+                <a:lnTo>
+                  <a:pt x="1825139" y="386833"/>
+                </a:lnTo>
+                <a:lnTo>
+                  <a:pt x="1846612" y="396792"/>
+                </a:lnTo>
+                <a:lnTo>
+                  <a:pt x="1868084" y="406911"/>
+                </a:lnTo>
+                <a:lnTo>
+                  <a:pt x="1889556" y="417193"/>
+                </a:lnTo>
+                <a:lnTo>
+                  <a:pt x="1911028" y="427641"/>
+                </a:lnTo>
+                <a:lnTo>
+                  <a:pt x="1932501" y="438256"/>
+                </a:lnTo>
+                <a:lnTo>
+                  <a:pt x="1953973" y="449041"/>
+                </a:lnTo>
+                <a:lnTo>
+                  <a:pt x="1975445" y="459999"/>
+                </a:lnTo>
+                <a:lnTo>
+                  <a:pt x="1996917" y="471131"/>
+                </a:lnTo>
+                <a:lnTo>
+                  <a:pt x="2018390" y="482440"/>
+                </a:lnTo>
+                <a:lnTo>
+                  <a:pt x="2039862" y="493930"/>
+                </a:lnTo>
+                <a:lnTo>
+                  <a:pt x="2061334" y="505603"/>
+                </a:lnTo>
+                <a:lnTo>
+                  <a:pt x="2082806" y="517461"/>
+                </a:lnTo>
+                <a:lnTo>
+                  <a:pt x="2104279" y="529509"/>
+                </a:lnTo>
+                <a:lnTo>
+                  <a:pt x="2125751" y="541748"/>
+                </a:lnTo>
+                <a:lnTo>
+                  <a:pt x="2147223" y="554182"/>
+                </a:lnTo>
+                <a:lnTo>
+                  <a:pt x="2168695" y="566815"/>
+                </a:lnTo>
+                <a:lnTo>
+                  <a:pt x="2190167" y="579649"/>
+                </a:lnTo>
+                <a:lnTo>
+                  <a:pt x="2211640" y="592689"/>
+                </a:lnTo>
+                <a:lnTo>
+                  <a:pt x="2233112" y="605939"/>
+                </a:lnTo>
+                <a:lnTo>
+                  <a:pt x="2254584" y="619401"/>
+                </a:lnTo>
+                <a:lnTo>
+                  <a:pt x="2276056" y="633081"/>
+                </a:lnTo>
+                <a:lnTo>
+                  <a:pt x="2297529" y="646981"/>
+                </a:lnTo>
+                <a:lnTo>
+                  <a:pt x="2319001" y="661108"/>
+                </a:lnTo>
+                <a:lnTo>
+                  <a:pt x="2340473" y="675465"/>
+                </a:lnTo>
+                <a:lnTo>
+                  <a:pt x="2361945" y="690057"/>
+                </a:lnTo>
+                <a:lnTo>
+                  <a:pt x="2383418" y="704888"/>
+                </a:lnTo>
+                <a:lnTo>
+                  <a:pt x="2404890" y="719965"/>
+                </a:lnTo>
+                <a:lnTo>
+                  <a:pt x="2426362" y="735293"/>
+                </a:lnTo>
+                <a:lnTo>
+                  <a:pt x="2447834" y="750876"/>
+                </a:lnTo>
+                <a:lnTo>
+                  <a:pt x="2469307" y="766722"/>
+                </a:lnTo>
+                <a:lnTo>
+                  <a:pt x="2490779" y="782836"/>
+                </a:lnTo>
+                <a:lnTo>
+                  <a:pt x="2512251" y="799224"/>
+                </a:lnTo>
+                <a:lnTo>
+                  <a:pt x="2533723" y="815894"/>
+                </a:lnTo>
+                <a:lnTo>
+                  <a:pt x="2555195" y="832853"/>
+                </a:lnTo>
+                <a:lnTo>
+                  <a:pt x="2576668" y="850107"/>
+                </a:lnTo>
+                <a:lnTo>
+                  <a:pt x="2598140" y="867665"/>
+                </a:lnTo>
+                <a:lnTo>
+                  <a:pt x="2619612" y="885536"/>
+                </a:lnTo>
+                <a:lnTo>
+                  <a:pt x="2641084" y="903727"/>
+                </a:lnTo>
+                <a:lnTo>
+                  <a:pt x="2662557" y="922248"/>
+                </a:lnTo>
+                <a:lnTo>
+                  <a:pt x="2684029" y="941109"/>
+                </a:lnTo>
+                <a:lnTo>
+                  <a:pt x="2705501" y="960319"/>
+                </a:lnTo>
+                <a:lnTo>
+                  <a:pt x="2726973" y="979890"/>
+                </a:lnTo>
+                <a:lnTo>
+                  <a:pt x="2748446" y="999833"/>
+                </a:lnTo>
+                <a:lnTo>
+                  <a:pt x="2769918" y="1020160"/>
+                </a:lnTo>
+                <a:lnTo>
+                  <a:pt x="2791390" y="1040883"/>
+                </a:lnTo>
+                <a:lnTo>
+                  <a:pt x="2812862" y="1062018"/>
+                </a:lnTo>
+                <a:lnTo>
+                  <a:pt x="2834334" y="1083577"/>
+                </a:lnTo>
+                <a:lnTo>
+                  <a:pt x="2855807" y="1105577"/>
+                </a:lnTo>
+                <a:lnTo>
+                  <a:pt x="2877279" y="1128033"/>
+                </a:lnTo>
+                <a:lnTo>
+                  <a:pt x="2898751" y="1150965"/>
+                </a:lnTo>
+                <a:lnTo>
+                  <a:pt x="2920223" y="1174390"/>
+                </a:lnTo>
+                <a:lnTo>
+                  <a:pt x="2941696" y="1198329"/>
+                </a:lnTo>
+                <a:lnTo>
+                  <a:pt x="2963168" y="1222805"/>
+                </a:lnTo>
+                <a:lnTo>
+                  <a:pt x="2984640" y="1247839"/>
+                </a:lnTo>
+                <a:lnTo>
+                  <a:pt x="3006112" y="1273459"/>
+                </a:lnTo>
+                <a:lnTo>
+                  <a:pt x="3027585" y="1299691"/>
+                </a:lnTo>
+                <a:lnTo>
+                  <a:pt x="3049057" y="1326566"/>
+                </a:lnTo>
+                <a:lnTo>
+                  <a:pt x="3070529" y="1354117"/>
+                </a:lnTo>
+                <a:lnTo>
+                  <a:pt x="3092001" y="1382378"/>
+                </a:lnTo>
+                <a:lnTo>
+                  <a:pt x="3113474" y="1411389"/>
+                </a:lnTo>
+                <a:lnTo>
+                  <a:pt x="3134946" y="1441193"/>
+                </a:lnTo>
+                <a:lnTo>
+                  <a:pt x="3156418" y="1471838"/>
+                </a:lnTo>
+                <a:lnTo>
+                  <a:pt x="3177890" y="1503375"/>
+                </a:lnTo>
+                <a:lnTo>
+                  <a:pt x="3199362" y="1535863"/>
+                </a:lnTo>
+                <a:lnTo>
+                  <a:pt x="3220835" y="1569367"/>
+                </a:lnTo>
+                <a:lnTo>
+                  <a:pt x="3242307" y="1603960"/>
+                </a:lnTo>
+                <a:lnTo>
+                  <a:pt x="3263779" y="1639725"/>
+                </a:lnTo>
+                <a:lnTo>
+                  <a:pt x="3285251" y="1676755"/>
+                </a:lnTo>
+                <a:lnTo>
+                  <a:pt x="3306724" y="1715158"/>
+                </a:lnTo>
+                <a:lnTo>
+                  <a:pt x="3328196" y="1755057"/>
+                </a:lnTo>
+                <a:lnTo>
+                  <a:pt x="3349668" y="1796595"/>
+                </a:lnTo>
+                <a:lnTo>
+                  <a:pt x="3371140" y="1839939"/>
+                </a:lnTo>
+                <a:lnTo>
+                  <a:pt x="3392613" y="1885290"/>
+                </a:lnTo>
+                <a:lnTo>
+                  <a:pt x="3414085" y="1932884"/>
+                </a:lnTo>
+                <a:lnTo>
+                  <a:pt x="3435557" y="1983011"/>
+                </a:lnTo>
+                <a:lnTo>
+                  <a:pt x="3457029" y="2036028"/>
+                </a:lnTo>
+                <a:lnTo>
+                  <a:pt x="3478502" y="2092384"/>
+                </a:lnTo>
+                <a:lnTo>
+                  <a:pt x="3499974" y="2152656"/>
+                </a:lnTo>
+                <a:lnTo>
+                  <a:pt x="3521446" y="2217610"/>
+                </a:lnTo>
+                <a:lnTo>
+                  <a:pt x="3542918" y="2288290"/>
+                </a:lnTo>
+                <a:lnTo>
+                  <a:pt x="3564390" y="2366191"/>
+                </a:lnTo>
+                <a:lnTo>
+                  <a:pt x="3585863" y="2453581"/>
+                </a:lnTo>
+                <a:lnTo>
+                  <a:pt x="3607335" y="2554197"/>
+                </a:lnTo>
+                <a:lnTo>
+                  <a:pt x="3628807" y="2675025"/>
+                </a:lnTo>
+                <a:lnTo>
+                  <a:pt x="3650279" y="2832355"/>
+                </a:lnTo>
+                <a:lnTo>
+                  <a:pt x="3671752" y="3092097"/>
+                </a:lnTo>
+                <a:lnTo>
+                  <a:pt x="3678909" y="3304248"/>
+                </a:lnTo>
+              </a:path>
+            </a:pathLst>
+          </a:custGeom>
+          <a:noFill/>
+          <a:ln w="38100">
+            <a:solidFill>
+              <a:srgbClr val="8EDBD4"/>
+            </a:solidFill>
+          </a:ln>
+          <a:effectLst/>
+        </p:spPr>
+        <p:txBody>
+          <a:bodyPr rtlCol="0" anchor="ctr"/>
+          <a:lstStyle/>
+          <a:p>
+            <a:pPr algn="ctr"/>
+          </a:p>
+        </p:txBody>
+      </p:sp>
+      <p:cxnSp>
+        <p:nvCxnSpPr>
+          <p:cNvPr id="36" name="C3-E07 line 34" descr="sci-ppt:o034"/>
+          <p:cNvCxnSpPr/>
+          <p:nvPr/>
+        </p:nvCxnSpPr>
+        <p:spPr>
+          <a:xfrm>
+            <a:off x="4593309" y="1371600"/>
+            <a:ext cx="0" cy="3657600"/>
+          </a:xfrm>
+          <a:prstGeom prst="line">
+            <a:avLst/>
+          </a:prstGeom>
+          <a:ln w="12700">
+            <a:solidFill>
+              <a:srgbClr val="8EDBD4"/>
+            </a:solidFill>
+            <a:prstDash val="dash"/>
+          </a:ln>
+          <a:effectLst/>
+        </p:spPr>
+      </p:cxnSp>
+      <p:sp>
+        <p:nvSpPr>
+          <p:cNvPr id="37" name="C3-E07 polygon 35" descr="sci-ppt:o035"/>
+          <p:cNvSpPr/>
+          <p:nvPr/>
+        </p:nvSpPr>
+        <p:spPr>
+          <a:xfrm>
+            <a:off x="914400" y="1545771"/>
+            <a:ext cx="4945771" cy="3309349"/>
+          </a:xfrm>
+          <a:custGeom>
+            <a:avLst/>
+            <a:gdLst/>
+            <a:ahLst/>
+            <a:cxnLst/>
+            <a:rect l="l" t="t" r="r" b="b"/>
+            <a:pathLst>
+              <a:path w="4945771" h="3309349">
+                <a:moveTo>
+                  <a:pt x="0" y="0"/>
+                </a:moveTo>
+                <a:lnTo>
+                  <a:pt x="28629" y="44"/>
+                </a:lnTo>
+                <a:lnTo>
+                  <a:pt x="57259" y="176"/>
+                </a:lnTo>
+                <a:lnTo>
+                  <a:pt x="85888" y="397"/>
+                </a:lnTo>
+                <a:lnTo>
+                  <a:pt x="114518" y="706"/>
+                </a:lnTo>
+                <a:lnTo>
+                  <a:pt x="143148" y="1103"/>
+                </a:lnTo>
+                <a:lnTo>
+                  <a:pt x="171777" y="1588"/>
+                </a:lnTo>
+                <a:lnTo>
+                  <a:pt x="200407" y="2162"/>
+                </a:lnTo>
+                <a:lnTo>
+                  <a:pt x="229037" y="2824"/>
+                </a:lnTo>
+                <a:lnTo>
+                  <a:pt x="257666" y="3575"/>
+                </a:lnTo>
+                <a:lnTo>
+                  <a:pt x="286296" y="4414"/>
+                </a:lnTo>
+                <a:lnTo>
+                  <a:pt x="314926" y="5342"/>
+                </a:lnTo>
+                <a:lnTo>
+                  <a:pt x="343555" y="6359"/>
+                </a:lnTo>
+                <a:lnTo>
+                  <a:pt x="372185" y="7466"/>
+                </a:lnTo>
+                <a:lnTo>
+                  <a:pt x="400815" y="8661"/>
+                </a:lnTo>
+                <a:lnTo>
+                  <a:pt x="429444" y="9945"/>
+                </a:lnTo>
+                <a:lnTo>
+                  <a:pt x="458074" y="11319"/>
+                </a:lnTo>
+                <a:lnTo>
+                  <a:pt x="486703" y="12783"/>
+                </a:lnTo>
+                <a:lnTo>
+                  <a:pt x="515333" y="14336"/>
+                </a:lnTo>
+                <a:lnTo>
+                  <a:pt x="543963" y="15980"/>
+                </a:lnTo>
+                <a:lnTo>
+                  <a:pt x="572592" y="17713"/>
+                </a:lnTo>
+                <a:lnTo>
+                  <a:pt x="601222" y="19538"/>
+                </a:lnTo>
+                <a:lnTo>
+                  <a:pt x="629852" y="21452"/>
+                </a:lnTo>
+                <a:lnTo>
+                  <a:pt x="658481" y="23458"/>
+                </a:lnTo>
+                <a:lnTo>
+                  <a:pt x="687111" y="25555"/>
+                </a:lnTo>
+                <a:lnTo>
+                  <a:pt x="715741" y="27744"/>
+                </a:lnTo>
+                <a:lnTo>
+                  <a:pt x="744370" y="30024"/>
+                </a:lnTo>
+                <a:lnTo>
+                  <a:pt x="773000" y="32397"/>
+                </a:lnTo>
+                <a:lnTo>
+                  <a:pt x="801630" y="34861"/>
+                </a:lnTo>
+                <a:lnTo>
+                  <a:pt x="830259" y="37419"/>
+                </a:lnTo>
+                <a:lnTo>
+                  <a:pt x="858889" y="40070"/>
+                </a:lnTo>
+                <a:lnTo>
+                  <a:pt x="887519" y="42814"/>
+                </a:lnTo>
+                <a:lnTo>
+                  <a:pt x="916148" y="45651"/>
+                </a:lnTo>
+                <a:lnTo>
+                  <a:pt x="944778" y="48584"/>
+                </a:lnTo>
+                <a:lnTo>
+                  <a:pt x="973407" y="51610"/>
+                </a:lnTo>
+                <a:lnTo>
+                  <a:pt x="1002037" y="54732"/>
+                </a:lnTo>
+                <a:lnTo>
+                  <a:pt x="1030667" y="57949"/>
+                </a:lnTo>
+                <a:lnTo>
+                  <a:pt x="1059296" y="61262"/>
+                </a:lnTo>
+                <a:lnTo>
+                  <a:pt x="1087926" y="64671"/>
+                </a:lnTo>
+                <a:lnTo>
+                  <a:pt x="1116556" y="68177"/>
+                </a:lnTo>
+                <a:lnTo>
+                  <a:pt x="1145185" y="71781"/>
+                </a:lnTo>
+                <a:lnTo>
+                  <a:pt x="1173815" y="75482"/>
+                </a:lnTo>
+                <a:lnTo>
+                  <a:pt x="1202445" y="79281"/>
+                </a:lnTo>
+                <a:lnTo>
+                  <a:pt x="1231074" y="83180"/>
+                </a:lnTo>
+                <a:lnTo>
+                  <a:pt x="1259704" y="87178"/>
+                </a:lnTo>
+                <a:lnTo>
+                  <a:pt x="1288334" y="91276"/>
+                </a:lnTo>
+                <a:lnTo>
+                  <a:pt x="1316963" y="95474"/>
+                </a:lnTo>
+                <a:lnTo>
+                  <a:pt x="1345593" y="99774"/>
+                </a:lnTo>
+                <a:lnTo>
+                  <a:pt x="1374223" y="104176"/>
+                </a:lnTo>
+                <a:lnTo>
+                  <a:pt x="1402852" y="108680"/>
+                </a:lnTo>
+                <a:lnTo>
+                  <a:pt x="1431482" y="113287"/>
+                </a:lnTo>
+                <a:lnTo>
+                  <a:pt x="1460111" y="117999"/>
+                </a:lnTo>
+                <a:lnTo>
+                  <a:pt x="1488741" y="122815"/>
+                </a:lnTo>
+                <a:lnTo>
+                  <a:pt x="1517371" y="127736"/>
+                </a:lnTo>
+                <a:lnTo>
+                  <a:pt x="1546000" y="132764"/>
+                </a:lnTo>
+                <a:lnTo>
+                  <a:pt x="1574630" y="137898"/>
+                </a:lnTo>
+                <a:lnTo>
+                  <a:pt x="1603260" y="143140"/>
+                </a:lnTo>
+                <a:lnTo>
+                  <a:pt x="1631889" y="148491"/>
+                </a:lnTo>
+                <a:lnTo>
+                  <a:pt x="1660519" y="153951"/>
+                </a:lnTo>
+                <a:lnTo>
+                  <a:pt x="1689149" y="159521"/>
+                </a:lnTo>
+                <a:lnTo>
+                  <a:pt x="1717778" y="165203"/>
+                </a:lnTo>
+                <a:lnTo>
+                  <a:pt x="1746408" y="170997"/>
+                </a:lnTo>
+                <a:lnTo>
+                  <a:pt x="1775038" y="176903"/>
+                </a:lnTo>
+                <a:lnTo>
+                  <a:pt x="1803667" y="182924"/>
+                </a:lnTo>
+                <a:lnTo>
+                  <a:pt x="1832297" y="189060"/>
+                </a:lnTo>
+                <a:lnTo>
+                  <a:pt x="1860927" y="195312"/>
+                </a:lnTo>
+                <a:lnTo>
+                  <a:pt x="1889556" y="201682"/>
+                </a:lnTo>
+                <a:lnTo>
+                  <a:pt x="1918186" y="208170"/>
+                </a:lnTo>
+                <a:lnTo>
+                  <a:pt x="1946815" y="214777"/>
+                </a:lnTo>
+                <a:lnTo>
+                  <a:pt x="1975445" y="221505"/>
+                </a:lnTo>
+                <a:lnTo>
+                  <a:pt x="2004075" y="228355"/>
+                </a:lnTo>
+                <a:lnTo>
+                  <a:pt x="2032704" y="235327"/>
+                </a:lnTo>
+                <a:lnTo>
+                  <a:pt x="2061334" y="242425"/>
+                </a:lnTo>
+                <a:lnTo>
+                  <a:pt x="2089964" y="249648"/>
+                </a:lnTo>
+                <a:lnTo>
+                  <a:pt x="2118593" y="256998"/>
+                </a:lnTo>
+                <a:lnTo>
+                  <a:pt x="2147223" y="264477"/>
+                </a:lnTo>
+                <a:lnTo>
+                  <a:pt x="2175853" y="272086"/>
+                </a:lnTo>
+                <a:lnTo>
+                  <a:pt x="2204482" y="279826"/>
+                </a:lnTo>
+                <a:lnTo>
+                  <a:pt x="2233112" y="287699"/>
+                </a:lnTo>
+                <a:lnTo>
+                  <a:pt x="2261742" y="295707"/>
+                </a:lnTo>
+                <a:lnTo>
+                  <a:pt x="2290371" y="303851"/>
+                </a:lnTo>
+                <a:lnTo>
+                  <a:pt x="2319001" y="312133"/>
+                </a:lnTo>
+                <a:lnTo>
+                  <a:pt x="2347631" y="320554"/>
+                </a:lnTo>
+                <a:lnTo>
+                  <a:pt x="2376260" y="329117"/>
+                </a:lnTo>
+                <a:lnTo>
+                  <a:pt x="2404890" y="337824"/>
+                </a:lnTo>
+                <a:lnTo>
+                  <a:pt x="2433519" y="346675"/>
+                </a:lnTo>
+                <a:lnTo>
+                  <a:pt x="2462149" y="355674"/>
+                </a:lnTo>
+                <a:lnTo>
+                  <a:pt x="2490779" y="364822"/>
+                </a:lnTo>
+                <a:lnTo>
+                  <a:pt x="2519408" y="374121"/>
+                </a:lnTo>
+                <a:lnTo>
+                  <a:pt x="2548038" y="383574"/>
+                </a:lnTo>
+                <a:lnTo>
+                  <a:pt x="2576668" y="393182"/>
+                </a:lnTo>
+                <a:lnTo>
+                  <a:pt x="2605297" y="402948"/>
+                </a:lnTo>
+                <a:lnTo>
+                  <a:pt x="2633927" y="412875"/>
+                </a:lnTo>
+                <a:lnTo>
+                  <a:pt x="2662557" y="422965"/>
+                </a:lnTo>
+                <a:lnTo>
+                  <a:pt x="2691186" y="433221"/>
+                </a:lnTo>
+                <a:lnTo>
+                  <a:pt x="2719816" y="443644"/>
+                </a:lnTo>
+                <a:lnTo>
+                  <a:pt x="2748446" y="454239"/>
+                </a:lnTo>
+                <a:lnTo>
+                  <a:pt x="2777075" y="465007"/>
+                </a:lnTo>
+                <a:lnTo>
+                  <a:pt x="2805705" y="475952"/>
+                </a:lnTo>
+                <a:lnTo>
+                  <a:pt x="2834334" y="487076"/>
+                </a:lnTo>
+                <a:lnTo>
+                  <a:pt x="2862964" y="498384"/>
+                </a:lnTo>
+                <a:lnTo>
+                  <a:pt x="2891594" y="509878"/>
+                </a:lnTo>
+                <a:lnTo>
+                  <a:pt x="2920223" y="521561"/>
+                </a:lnTo>
+                <a:lnTo>
+                  <a:pt x="2948853" y="533437"/>
+                </a:lnTo>
+                <a:lnTo>
+                  <a:pt x="2977483" y="545511"/>
+                </a:lnTo>
+                <a:lnTo>
+                  <a:pt x="3006112" y="557785"/>
+                </a:lnTo>
+                <a:lnTo>
+                  <a:pt x="3034742" y="570264"/>
+                </a:lnTo>
+                <a:lnTo>
+                  <a:pt x="3063372" y="582951"/>
+                </a:lnTo>
+                <a:lnTo>
+                  <a:pt x="3092001" y="595851"/>
+                </a:lnTo>
+                <a:lnTo>
+                  <a:pt x="3120631" y="608969"/>
+                </a:lnTo>
+                <a:lnTo>
+                  <a:pt x="3149261" y="622310"/>
+                </a:lnTo>
+                <a:lnTo>
+                  <a:pt x="3177890" y="635877"/>
+                </a:lnTo>
+                <a:lnTo>
+                  <a:pt x="3206520" y="649676"/>
+                </a:lnTo>
+                <a:lnTo>
+                  <a:pt x="3235150" y="663713"/>
+                </a:lnTo>
+                <a:lnTo>
+                  <a:pt x="3263779" y="677993"/>
+                </a:lnTo>
+                <a:lnTo>
+                  <a:pt x="3292409" y="692522"/>
+                </a:lnTo>
+                <a:lnTo>
+                  <a:pt x="3321038" y="707305"/>
+                </a:lnTo>
+                <a:lnTo>
+                  <a:pt x="3349668" y="722350"/>
+                </a:lnTo>
+                <a:lnTo>
+                  <a:pt x="3378298" y="737662"/>
+                </a:lnTo>
+                <a:lnTo>
+                  <a:pt x="3406927" y="753249"/>
+                </a:lnTo>
+                <a:lnTo>
+                  <a:pt x="3435557" y="769118"/>
+                </a:lnTo>
+                <a:lnTo>
+                  <a:pt x="3464187" y="785277"/>
+                </a:lnTo>
+                <a:lnTo>
+                  <a:pt x="3492816" y="801733"/>
+                </a:lnTo>
+                <a:lnTo>
+                  <a:pt x="3521446" y="818495"/>
+                </a:lnTo>
+                <a:lnTo>
+                  <a:pt x="3550076" y="835573"/>
+                </a:lnTo>
+                <a:lnTo>
+                  <a:pt x="3578705" y="852975"/>
+                </a:lnTo>
+                <a:lnTo>
+                  <a:pt x="3607335" y="870711"/>
+                </a:lnTo>
+                <a:lnTo>
+                  <a:pt x="3635965" y="888792"/>
+                </a:lnTo>
+                <a:lnTo>
+                  <a:pt x="3664594" y="907229"/>
+                </a:lnTo>
+                <a:lnTo>
+                  <a:pt x="3693224" y="926034"/>
+                </a:lnTo>
+                <a:lnTo>
+                  <a:pt x="3721854" y="945218"/>
+                </a:lnTo>
+                <a:lnTo>
+                  <a:pt x="3750483" y="964796"/>
+                </a:lnTo>
+                <a:lnTo>
+                  <a:pt x="3779113" y="984781"/>
+                </a:lnTo>
+                <a:lnTo>
+                  <a:pt x="3807742" y="1005188"/>
+                </a:lnTo>
+                <a:lnTo>
+                  <a:pt x="3836372" y="1026034"/>
+                </a:lnTo>
+                <a:lnTo>
+                  <a:pt x="3865002" y="1047334"/>
+                </a:lnTo>
+                <a:lnTo>
+                  <a:pt x="3893631" y="1069108"/>
+                </a:lnTo>
+                <a:lnTo>
+                  <a:pt x="3922261" y="1091374"/>
+                </a:lnTo>
+                <a:lnTo>
+                  <a:pt x="3950891" y="1114154"/>
+                </a:lnTo>
+                <a:lnTo>
+                  <a:pt x="3979520" y="1137470"/>
+                </a:lnTo>
+                <a:lnTo>
+                  <a:pt x="4008150" y="1161346"/>
+                </a:lnTo>
+                <a:lnTo>
+                  <a:pt x="4036780" y="1185808"/>
+                </a:lnTo>
+                <a:lnTo>
+                  <a:pt x="4065409" y="1210886"/>
+                </a:lnTo>
+                <a:lnTo>
+                  <a:pt x="4094039" y="1236609"/>
+                </a:lnTo>
+                <a:lnTo>
+                  <a:pt x="4122669" y="1263011"/>
+                </a:lnTo>
+                <a:lnTo>
+                  <a:pt x="4151298" y="1290128"/>
+                </a:lnTo>
+                <a:lnTo>
+                  <a:pt x="4179928" y="1318001"/>
+                </a:lnTo>
+                <a:lnTo>
+                  <a:pt x="4208558" y="1346674"/>
+                </a:lnTo>
+                <a:lnTo>
+                  <a:pt x="4237187" y="1376194"/>
+                </a:lnTo>
+                <a:lnTo>
+                  <a:pt x="4265817" y="1406616"/>
+                </a:lnTo>
+                <a:lnTo>
+                  <a:pt x="4294446" y="1437999"/>
+                </a:lnTo>
+                <a:lnTo>
+                  <a:pt x="4323076" y="1470409"/>
+                </a:lnTo>
+                <a:lnTo>
+                  <a:pt x="4351706" y="1503921"/>
+                </a:lnTo>
+                <a:lnTo>
+                  <a:pt x="4380335" y="1538619"/>
+                </a:lnTo>
+                <a:lnTo>
+                  <a:pt x="4408965" y="1574598"/>
+                </a:lnTo>
+                <a:lnTo>
+                  <a:pt x="4437595" y="1611967"/>
+                </a:lnTo>
+                <a:lnTo>
+                  <a:pt x="4466224" y="1650850"/>
+                </a:lnTo>
+                <a:lnTo>
+                  <a:pt x="4494854" y="1691392"/>
+                </a:lnTo>
+                <a:lnTo>
+                  <a:pt x="4523484" y="1733763"/>
+                </a:lnTo>
+                <a:lnTo>
+                  <a:pt x="4552113" y="1778160"/>
+                </a:lnTo>
+                <a:lnTo>
+                  <a:pt x="4580743" y="1824823"/>
+                </a:lnTo>
+                <a:lnTo>
+                  <a:pt x="4609373" y="1874040"/>
+                </a:lnTo>
+                <a:lnTo>
+                  <a:pt x="4638002" y="1926162"/>
+                </a:lnTo>
+                <a:lnTo>
+                  <a:pt x="4666632" y="1981633"/>
+                </a:lnTo>
+                <a:lnTo>
+                  <a:pt x="4695262" y="2041015"/>
+                </a:lnTo>
+                <a:lnTo>
+                  <a:pt x="4723891" y="2105045"/>
+                </a:lnTo>
+                <a:lnTo>
+                  <a:pt x="4752521" y="2174719"/>
+                </a:lnTo>
+                <a:lnTo>
+                  <a:pt x="4781150" y="2251438"/>
+                </a:lnTo>
+                <a:lnTo>
+                  <a:pt x="4809780" y="2337273"/>
+                </a:lnTo>
+                <a:lnTo>
+                  <a:pt x="4838410" y="2435523"/>
+                </a:lnTo>
+                <a:lnTo>
+                  <a:pt x="4867039" y="2552021"/>
+                </a:lnTo>
+                <a:lnTo>
+                  <a:pt x="4895669" y="2699033"/>
+                </a:lnTo>
+                <a:lnTo>
+                  <a:pt x="4924299" y="2913323"/>
+                </a:lnTo>
+                <a:lnTo>
+                  <a:pt x="4945771" y="3309349"/>
+                </a:lnTo>
+              </a:path>
+            </a:pathLst>
+          </a:custGeom>
+          <a:noFill/>
+          <a:ln w="38100">
+            <a:solidFill>
+              <a:srgbClr val="F2B880"/>
+            </a:solidFill>
+          </a:ln>
+          <a:effectLst/>
+        </p:spPr>
+        <p:txBody>
+          <a:bodyPr rtlCol="0" anchor="ctr"/>
+          <a:lstStyle/>
+          <a:p>
+            <a:pPr algn="ctr"/>
+          </a:p>
+        </p:txBody>
+      </p:sp>
+      <p:cxnSp>
+        <p:nvCxnSpPr>
+          <p:cNvPr id="38" name="C3-E07 line 36" descr="sci-ppt:o036"/>
+          <p:cNvCxnSpPr/>
+          <p:nvPr/>
+        </p:nvCxnSpPr>
+        <p:spPr>
+          <a:xfrm>
+            <a:off x="5860171" y="1371600"/>
+            <a:ext cx="0" cy="3657600"/>
+          </a:xfrm>
+          <a:prstGeom prst="line">
+            <a:avLst/>
+          </a:prstGeom>
+          <a:ln w="12700">
+            <a:solidFill>
+              <a:srgbClr val="F2B880"/>
+            </a:solidFill>
+            <a:prstDash val="dash"/>
+          </a:ln>
+          <a:effectLst/>
+        </p:spPr>
+      </p:cxnSp>
+      <p:sp>
+        <p:nvSpPr>
+          <p:cNvPr id="39" name="C3-E07 polygon 37" descr="sci-ppt:o037"/>
+          <p:cNvSpPr/>
+          <p:nvPr/>
+        </p:nvSpPr>
+        <p:spPr>
+          <a:xfrm>
+            <a:off x="914400" y="1545771"/>
+            <a:ext cx="6012225" cy="1472321"/>
+          </a:xfrm>
+          <a:custGeom>
+            <a:avLst/>
+            <a:gdLst/>
+            <a:ahLst/>
+            <a:cxnLst/>
+            <a:rect l="l" t="t" r="r" b="b"/>
+            <a:pathLst>
+              <a:path w="6012225" h="1472321">
+                <a:moveTo>
+                  <a:pt x="0" y="0"/>
+                </a:moveTo>
+                <a:lnTo>
+                  <a:pt x="42944" y="50"/>
+                </a:lnTo>
+                <a:lnTo>
+                  <a:pt x="85888" y="198"/>
+                </a:lnTo>
+                <a:lnTo>
+                  <a:pt x="128833" y="446"/>
+                </a:lnTo>
+                <a:lnTo>
+                  <a:pt x="171777" y="794"/>
+                </a:lnTo>
+                <a:lnTo>
+                  <a:pt x="214722" y="1241"/>
+                </a:lnTo>
+                <a:lnTo>
+                  <a:pt x="257666" y="1787"/>
+                </a:lnTo>
+                <a:lnTo>
+                  <a:pt x="300611" y="2432"/>
+                </a:lnTo>
+                <a:lnTo>
+                  <a:pt x="343555" y="3178"/>
+                </a:lnTo>
+                <a:lnTo>
+                  <a:pt x="386500" y="4022"/>
+                </a:lnTo>
+                <a:lnTo>
+                  <a:pt x="429444" y="4967"/>
+                </a:lnTo>
+                <a:lnTo>
+                  <a:pt x="472389" y="6012"/>
+                </a:lnTo>
+                <a:lnTo>
+                  <a:pt x="515333" y="7157"/>
+                </a:lnTo>
+                <a:lnTo>
+                  <a:pt x="558278" y="8402"/>
+                </a:lnTo>
+                <a:lnTo>
+                  <a:pt x="601222" y="9748"/>
+                </a:lnTo>
+                <a:lnTo>
+                  <a:pt x="644167" y="11195"/>
+                </a:lnTo>
+                <a:lnTo>
+                  <a:pt x="687111" y="12742"/>
+                </a:lnTo>
+                <a:lnTo>
+                  <a:pt x="730055" y="14391"/>
+                </a:lnTo>
+                <a:lnTo>
+                  <a:pt x="773000" y="16141"/>
+                </a:lnTo>
+                <a:lnTo>
+                  <a:pt x="815944" y="17994"/>
+                </a:lnTo>
+                <a:lnTo>
+                  <a:pt x="858889" y="19948"/>
+                </a:lnTo>
+                <a:lnTo>
+                  <a:pt x="901833" y="22004"/>
+                </a:lnTo>
+                <a:lnTo>
+                  <a:pt x="944778" y="24164"/>
+                </a:lnTo>
+                <a:lnTo>
+                  <a:pt x="987722" y="26426"/>
+                </a:lnTo>
+                <a:lnTo>
+                  <a:pt x="1030667" y="28792"/>
+                </a:lnTo>
+                <a:lnTo>
+                  <a:pt x="1073611" y="31262"/>
+                </a:lnTo>
+                <a:lnTo>
+                  <a:pt x="1116556" y="33836"/>
+                </a:lnTo>
+                <a:lnTo>
+                  <a:pt x="1159500" y="36514"/>
+                </a:lnTo>
+                <a:lnTo>
+                  <a:pt x="1202445" y="39298"/>
+                </a:lnTo>
+                <a:lnTo>
+                  <a:pt x="1245389" y="42187"/>
+                </a:lnTo>
+                <a:lnTo>
+                  <a:pt x="1288334" y="45183"/>
+                </a:lnTo>
+                <a:lnTo>
+                  <a:pt x="1331278" y="48284"/>
+                </a:lnTo>
+                <a:lnTo>
+                  <a:pt x="1374223" y="51494"/>
+                </a:lnTo>
+                <a:lnTo>
+                  <a:pt x="1417167" y="54810"/>
+                </a:lnTo>
+                <a:lnTo>
+                  <a:pt x="1460111" y="58235"/>
+                </a:lnTo>
+                <a:lnTo>
+                  <a:pt x="1503056" y="61769"/>
+                </a:lnTo>
+                <a:lnTo>
+                  <a:pt x="1546000" y="65412"/>
+                </a:lnTo>
+                <a:lnTo>
+                  <a:pt x="1588945" y="69165"/>
+                </a:lnTo>
+                <a:lnTo>
+                  <a:pt x="1631889" y="73029"/>
+                </a:lnTo>
+                <a:lnTo>
+                  <a:pt x="1674834" y="77004"/>
+                </a:lnTo>
+                <a:lnTo>
+                  <a:pt x="1717778" y="81092"/>
+                </a:lnTo>
+                <a:lnTo>
+                  <a:pt x="1760723" y="85292"/>
+                </a:lnTo>
+                <a:lnTo>
+                  <a:pt x="1803667" y="89606"/>
+                </a:lnTo>
+                <a:lnTo>
+                  <a:pt x="1846612" y="94034"/>
+                </a:lnTo>
+                <a:lnTo>
+                  <a:pt x="1889556" y="98578"/>
+                </a:lnTo>
+                <a:lnTo>
+                  <a:pt x="1932501" y="103237"/>
+                </a:lnTo>
+                <a:lnTo>
+                  <a:pt x="1975445" y="108014"/>
+                </a:lnTo>
+                <a:lnTo>
+                  <a:pt x="2018390" y="112908"/>
+                </a:lnTo>
+                <a:lnTo>
+                  <a:pt x="2061334" y="117921"/>
+                </a:lnTo>
+                <a:lnTo>
+                  <a:pt x="2104279" y="123053"/>
+                </a:lnTo>
+                <a:lnTo>
+                  <a:pt x="2147223" y="128306"/>
+                </a:lnTo>
+                <a:lnTo>
+                  <a:pt x="2190167" y="133681"/>
+                </a:lnTo>
+                <a:lnTo>
+                  <a:pt x="2233112" y="139179"/>
+                </a:lnTo>
+                <a:lnTo>
+                  <a:pt x="2276056" y="144801"/>
+                </a:lnTo>
+                <a:lnTo>
+                  <a:pt x="2319001" y="150547"/>
+                </a:lnTo>
+                <a:lnTo>
+                  <a:pt x="2361945" y="156420"/>
+                </a:lnTo>
+                <a:lnTo>
+                  <a:pt x="2404890" y="162419"/>
+                </a:lnTo>
+                <a:lnTo>
+                  <a:pt x="2447834" y="168548"/>
+                </a:lnTo>
+                <a:lnTo>
+                  <a:pt x="2490779" y="174806"/>
+                </a:lnTo>
+                <a:lnTo>
+                  <a:pt x="2533723" y="181196"/>
+                </a:lnTo>
+                <a:lnTo>
+                  <a:pt x="2576668" y="187718"/>
+                </a:lnTo>
+                <a:lnTo>
+                  <a:pt x="2619612" y="194374"/>
+                </a:lnTo>
+                <a:lnTo>
+                  <a:pt x="2662557" y="201165"/>
+                </a:lnTo>
+                <a:lnTo>
+                  <a:pt x="2705501" y="208093"/>
+                </a:lnTo>
+                <a:lnTo>
+                  <a:pt x="2748446" y="215159"/>
+                </a:lnTo>
+                <a:lnTo>
+                  <a:pt x="2791390" y="222366"/>
+                </a:lnTo>
+                <a:lnTo>
+                  <a:pt x="2834334" y="229714"/>
+                </a:lnTo>
+                <a:lnTo>
+                  <a:pt x="2877279" y="237206"/>
+                </a:lnTo>
+                <a:lnTo>
+                  <a:pt x="2920223" y="244842"/>
+                </a:lnTo>
+                <a:lnTo>
+                  <a:pt x="2963168" y="252626"/>
+                </a:lnTo>
+                <a:lnTo>
+                  <a:pt x="3006112" y="260558"/>
+                </a:lnTo>
+                <a:lnTo>
+                  <a:pt x="3049057" y="268642"/>
+                </a:lnTo>
+                <a:lnTo>
+                  <a:pt x="3092001" y="276878"/>
+                </a:lnTo>
+                <a:lnTo>
+                  <a:pt x="3134946" y="285268"/>
+                </a:lnTo>
+                <a:lnTo>
+                  <a:pt x="3177890" y="293816"/>
+                </a:lnTo>
+                <a:lnTo>
+                  <a:pt x="3220835" y="302524"/>
+                </a:lnTo>
+                <a:lnTo>
+                  <a:pt x="3263779" y="311392"/>
+                </a:lnTo>
+                <a:lnTo>
+                  <a:pt x="3306724" y="320425"/>
+                </a:lnTo>
+                <a:lnTo>
+                  <a:pt x="3349668" y="329624"/>
+                </a:lnTo>
+                <a:lnTo>
+                  <a:pt x="3392613" y="338992"/>
+                </a:lnTo>
+                <a:lnTo>
+                  <a:pt x="3435557" y="348531"/>
+                </a:lnTo>
+                <a:lnTo>
+                  <a:pt x="3478502" y="358245"/>
+                </a:lnTo>
+                <a:lnTo>
+                  <a:pt x="3521446" y="368136"/>
+                </a:lnTo>
+                <a:lnTo>
+                  <a:pt x="3564390" y="378207"/>
+                </a:lnTo>
+                <a:lnTo>
+                  <a:pt x="3607335" y="388461"/>
+                </a:lnTo>
+                <a:lnTo>
+                  <a:pt x="3650279" y="398902"/>
+                </a:lnTo>
+                <a:lnTo>
+                  <a:pt x="3693224" y="409532"/>
+                </a:lnTo>
+                <a:lnTo>
+                  <a:pt x="3736168" y="420355"/>
+                </a:lnTo>
+                <a:lnTo>
+                  <a:pt x="3779113" y="431375"/>
+                </a:lnTo>
+                <a:lnTo>
+                  <a:pt x="3822057" y="442595"/>
+                </a:lnTo>
+                <a:lnTo>
+                  <a:pt x="3865002" y="454019"/>
+                </a:lnTo>
+                <a:lnTo>
+                  <a:pt x="3907946" y="465652"/>
+                </a:lnTo>
+                <a:lnTo>
+                  <a:pt x="3950891" y="477496"/>
+                </a:lnTo>
+                <a:lnTo>
+                  <a:pt x="3993835" y="489557"/>
+                </a:lnTo>
+                <a:lnTo>
+                  <a:pt x="4036780" y="501840"/>
+                </a:lnTo>
+                <a:lnTo>
+                  <a:pt x="4079724" y="514348"/>
+                </a:lnTo>
+                <a:lnTo>
+                  <a:pt x="4122669" y="527087"/>
+                </a:lnTo>
+                <a:lnTo>
+                  <a:pt x="4165613" y="540061"/>
+                </a:lnTo>
+                <a:lnTo>
+                  <a:pt x="4208558" y="553277"/>
+                </a:lnTo>
+                <a:lnTo>
+                  <a:pt x="4251502" y="566740"/>
+                </a:lnTo>
+                <a:lnTo>
+                  <a:pt x="4294446" y="580455"/>
+                </a:lnTo>
+                <a:lnTo>
+                  <a:pt x="4337391" y="594429"/>
+                </a:lnTo>
+                <a:lnTo>
+                  <a:pt x="4380335" y="608667"/>
+                </a:lnTo>
+                <a:lnTo>
+                  <a:pt x="4423280" y="623178"/>
+                </a:lnTo>
+                <a:lnTo>
+                  <a:pt x="4466224" y="637968"/>
+                </a:lnTo>
+                <a:lnTo>
+                  <a:pt x="4509169" y="653043"/>
+                </a:lnTo>
+                <a:lnTo>
+                  <a:pt x="4552113" y="668413"/>
+                </a:lnTo>
+                <a:lnTo>
+                  <a:pt x="4595058" y="684084"/>
+                </a:lnTo>
+                <a:lnTo>
+                  <a:pt x="4638002" y="700067"/>
+                </a:lnTo>
+                <a:lnTo>
+                  <a:pt x="4680947" y="716369"/>
+                </a:lnTo>
+                <a:lnTo>
+                  <a:pt x="4723891" y="733000"/>
+                </a:lnTo>
+                <a:lnTo>
+                  <a:pt x="4766836" y="749970"/>
+                </a:lnTo>
+                <a:lnTo>
+                  <a:pt x="4809780" y="767290"/>
+                </a:lnTo>
+                <a:lnTo>
+                  <a:pt x="4852725" y="784972"/>
+                </a:lnTo>
+                <a:lnTo>
+                  <a:pt x="4895669" y="803026"/>
+                </a:lnTo>
+                <a:lnTo>
+                  <a:pt x="4938614" y="821466"/>
+                </a:lnTo>
+                <a:lnTo>
+                  <a:pt x="4981558" y="840304"/>
+                </a:lnTo>
+                <a:lnTo>
+                  <a:pt x="5024502" y="859556"/>
+                </a:lnTo>
+                <a:lnTo>
+                  <a:pt x="5067447" y="879237"/>
+                </a:lnTo>
+                <a:lnTo>
+                  <a:pt x="5110391" y="899361"/>
+                </a:lnTo>
+                <a:lnTo>
+                  <a:pt x="5153336" y="919948"/>
+                </a:lnTo>
+                <a:lnTo>
+                  <a:pt x="5196280" y="941014"/>
+                </a:lnTo>
+                <a:lnTo>
+                  <a:pt x="5239225" y="962581"/>
+                </a:lnTo>
+                <a:lnTo>
+                  <a:pt x="5282169" y="984669"/>
+                </a:lnTo>
+                <a:lnTo>
+                  <a:pt x="5325114" y="1007300"/>
+                </a:lnTo>
+                <a:lnTo>
+                  <a:pt x="5368058" y="1030500"/>
+                </a:lnTo>
+                <a:lnTo>
+                  <a:pt x="5411003" y="1054296"/>
+                </a:lnTo>
+                <a:lnTo>
+                  <a:pt x="5453947" y="1078715"/>
+                </a:lnTo>
+                <a:lnTo>
+                  <a:pt x="5496892" y="1103789"/>
+                </a:lnTo>
+                <a:lnTo>
+                  <a:pt x="5539836" y="1129553"/>
+                </a:lnTo>
+                <a:lnTo>
+                  <a:pt x="5582781" y="1156042"/>
+                </a:lnTo>
+                <a:lnTo>
+                  <a:pt x="5625725" y="1183298"/>
+                </a:lnTo>
+                <a:lnTo>
+                  <a:pt x="5668669" y="1211366"/>
+                </a:lnTo>
+                <a:lnTo>
+                  <a:pt x="5711614" y="1240293"/>
+                </a:lnTo>
+                <a:lnTo>
+                  <a:pt x="5754558" y="1270136"/>
+                </a:lnTo>
+                <a:lnTo>
+                  <a:pt x="5797503" y="1300952"/>
+                </a:lnTo>
+                <a:lnTo>
+                  <a:pt x="5840447" y="1332811"/>
+                </a:lnTo>
+                <a:lnTo>
+                  <a:pt x="5883392" y="1365787"/>
+                </a:lnTo>
+                <a:lnTo>
+                  <a:pt x="5926336" y="1399964"/>
+                </a:lnTo>
+                <a:lnTo>
+                  <a:pt x="5969281" y="1435439"/>
+                </a:lnTo>
+                <a:lnTo>
+                  <a:pt x="6012225" y="1472321"/>
+                </a:lnTo>
+              </a:path>
+            </a:pathLst>
+          </a:custGeom>
+          <a:noFill/>
+          <a:ln w="38100">
+            <a:solidFill>
+              <a:srgbClr val="F28BA0"/>
+            </a:solidFill>
+          </a:ln>
+          <a:effectLst/>
+        </p:spPr>
+        <p:txBody>
+          <a:bodyPr rtlCol="0" anchor="ctr"/>
+          <a:lstStyle/>
+          <a:p>
+            <a:pPr algn="ctr"/>
+          </a:p>
+        </p:txBody>
+      </p:sp>
+      <p:cxnSp>
+        <p:nvCxnSpPr>
+          <p:cNvPr id="40" name="C3-E07 line 38" descr="sci-ppt:o038"/>
+          <p:cNvCxnSpPr/>
+          <p:nvPr/>
+        </p:nvCxnSpPr>
+        <p:spPr>
+          <a:xfrm>
+            <a:off x="7706783" y="1371600"/>
+            <a:ext cx="0" cy="3657600"/>
+          </a:xfrm>
+          <a:prstGeom prst="line">
+            <a:avLst/>
+          </a:prstGeom>
+          <a:ln w="12700">
+            <a:solidFill>
+              <a:srgbClr val="F28BA0"/>
+            </a:solidFill>
+            <a:prstDash val="dash"/>
+          </a:ln>
+          <a:effectLst/>
+        </p:spPr>
+      </p:cxnSp>
+      <p:sp>
+        <p:nvSpPr>
+          <p:cNvPr id="41" name="C3-E07 rect 39" descr="sci-ppt:o039"/>
+          <p:cNvSpPr/>
+          <p:nvPr/>
+        </p:nvSpPr>
+        <p:spPr>
+          <a:xfrm>
+            <a:off x="1188720" y="3840480"/>
+            <a:ext cx="274320" cy="182880"/>
+          </a:xfrm>
+          <a:prstGeom prst="rect">
+            <a:avLst/>
+          </a:prstGeom>
+          <a:solidFill>
+            <a:srgbClr val="8EDBD4"/>
+          </a:solidFill>
+          <a:ln w="12700">
+            <a:solidFill>
+              <a:srgbClr val="8EDBD4"/>
+            </a:solidFill>
+          </a:ln>
+          <a:effectLst/>
+        </p:spPr>
+        <p:txBody>
+          <a:bodyPr rtlCol="0" anchor="ctr"/>
+          <a:lstStyle/>
+          <a:p>
+            <a:pPr algn="ctr"/>
+          </a:p>
+        </p:txBody>
+      </p:sp>
+      <p:sp>
+        <p:nvSpPr>
+          <p:cNvPr id="42" name="C3-E07 text 40" descr="sci-ppt:o040"/>
           <p:cNvSpPr txBox="1"/>
           <p:nvPr/>
         </p:nvSpPr>
         <p:spPr>
           <a:xfrm>
-            <a:off x="8138160" y="1874519"/>
-            <a:ext cx="1554480" cy="365760"/>
+            <a:off x="1572768" y="3794760"/>
+            <a:ext cx="3840480" cy="231648"/>
           </a:xfrm>
           <a:prstGeom prst="rect">
             <a:avLst/>
@@ -3258,7 +5735,7 @@
           <a:effectLst/>
         </p:spPr>
         <p:txBody>
-          <a:bodyPr wrap="square" lIns="27432" rIns="27432" tIns="18288" bIns="18288" anchor="ctr">
+          <a:bodyPr wrap="none" lIns="18288" rIns="18288" tIns="18288" bIns="18288" anchor="t">
             <a:spAutoFit/>
           </a:bodyPr>
           <a:lstStyle/>
@@ -3269,49 +5746,371 @@
               </a:spcAft>
             </a:pPr>
             <a:r>
-              <a:rPr sz="1700" b="0" i="0">
+              <a:rPr sz="1200" b="0" i="0">
+                <a:solidFill>
+                  <a:srgbClr val="8EDBD4"/>
+                </a:solidFill>
+                <a:latin typeface="Arial"/>
+              </a:rPr>
+              <a:t>χ = S Rₘₐₓ = 0  (no neighbours)</a:t>
+            </a:r>
+          </a:p>
+        </p:txBody>
+      </p:sp>
+      <p:sp>
+        <p:nvSpPr>
+          <p:cNvPr id="43" name="C3-E07 rect 41" descr="sci-ppt:o041"/>
+          <p:cNvSpPr/>
+          <p:nvPr/>
+        </p:nvSpPr>
+        <p:spPr>
+          <a:xfrm>
+            <a:off x="1188720" y="4169664"/>
+            <a:ext cx="274320" cy="182880"/>
+          </a:xfrm>
+          <a:prstGeom prst="rect">
+            <a:avLst/>
+          </a:prstGeom>
+          <a:solidFill>
+            <a:srgbClr val="F2B880"/>
+          </a:solidFill>
+          <a:ln w="12700">
+            <a:solidFill>
+              <a:srgbClr val="F2B880"/>
+            </a:solidFill>
+          </a:ln>
+          <a:effectLst/>
+        </p:spPr>
+        <p:txBody>
+          <a:bodyPr rtlCol="0" anchor="ctr"/>
+          <a:lstStyle/>
+          <a:p>
+            <a:pPr algn="ctr"/>
+          </a:p>
+        </p:txBody>
+      </p:sp>
+      <p:sp>
+        <p:nvSpPr>
+          <p:cNvPr id="44" name="C3-E07 text 42" descr="sci-ppt:o042"/>
+          <p:cNvSpPr txBox="1"/>
+          <p:nvPr/>
+        </p:nvSpPr>
+        <p:spPr>
+          <a:xfrm>
+            <a:off x="1572768" y="4123944"/>
+            <a:ext cx="3840480" cy="231648"/>
+          </a:xfrm>
+          <a:prstGeom prst="rect">
+            <a:avLst/>
+          </a:prstGeom>
+          <a:noFill/>
+          <a:effectLst/>
+        </p:spPr>
+        <p:txBody>
+          <a:bodyPr wrap="none" lIns="18288" rIns="18288" tIns="18288" bIns="18288" anchor="t">
+            <a:spAutoFit/>
+          </a:bodyPr>
+          <a:lstStyle/>
+          <a:p>
+            <a:pPr algn="l">
+              <a:spcAft>
+                <a:spcPts val="0"/>
+              </a:spcAft>
+            </a:pPr>
+            <a:r>
+              <a:rPr sz="1200" b="0" i="0">
+                <a:solidFill>
+                  <a:srgbClr val="F2B880"/>
+                </a:solidFill>
+                <a:latin typeface="Arial"/>
+              </a:rPr>
+              <a:t>χ = S Rₘₐₓ = 1</a:t>
+            </a:r>
+          </a:p>
+        </p:txBody>
+      </p:sp>
+      <p:sp>
+        <p:nvSpPr>
+          <p:cNvPr id="45" name="C3-E07 rect 43" descr="sci-ppt:o043"/>
+          <p:cNvSpPr/>
+          <p:nvPr/>
+        </p:nvSpPr>
+        <p:spPr>
+          <a:xfrm>
+            <a:off x="1188720" y="4498848"/>
+            <a:ext cx="274320" cy="182880"/>
+          </a:xfrm>
+          <a:prstGeom prst="rect">
+            <a:avLst/>
+          </a:prstGeom>
+          <a:solidFill>
+            <a:srgbClr val="F28BA0"/>
+          </a:solidFill>
+          <a:ln w="12700">
+            <a:solidFill>
+              <a:srgbClr val="F28BA0"/>
+            </a:solidFill>
+          </a:ln>
+          <a:effectLst/>
+        </p:spPr>
+        <p:txBody>
+          <a:bodyPr rtlCol="0" anchor="ctr"/>
+          <a:lstStyle/>
+          <a:p>
+            <a:pPr algn="ctr"/>
+          </a:p>
+        </p:txBody>
+      </p:sp>
+      <p:sp>
+        <p:nvSpPr>
+          <p:cNvPr id="46" name="C3-E07 text 44" descr="sci-ppt:o044"/>
+          <p:cNvSpPr txBox="1"/>
+          <p:nvPr/>
+        </p:nvSpPr>
+        <p:spPr>
+          <a:xfrm>
+            <a:off x="1572768" y="4453128"/>
+            <a:ext cx="3840480" cy="231648"/>
+          </a:xfrm>
+          <a:prstGeom prst="rect">
+            <a:avLst/>
+          </a:prstGeom>
+          <a:noFill/>
+          <a:effectLst/>
+        </p:spPr>
+        <p:txBody>
+          <a:bodyPr wrap="none" lIns="18288" rIns="18288" tIns="18288" bIns="18288" anchor="t">
+            <a:spAutoFit/>
+          </a:bodyPr>
+          <a:lstStyle/>
+          <a:p>
+            <a:pPr algn="l">
+              <a:spcAft>
+                <a:spcPts val="0"/>
+              </a:spcAft>
+            </a:pPr>
+            <a:r>
+              <a:rPr sz="1200" b="0" i="0">
+                <a:solidFill>
+                  <a:srgbClr val="F28BA0"/>
+                </a:solidFill>
+                <a:latin typeface="Arial"/>
+              </a:rPr>
+              <a:t>χ = S Rₘₐₓ = 3</a:t>
+            </a:r>
+          </a:p>
+        </p:txBody>
+      </p:sp>
+      <p:sp>
+        <p:nvSpPr>
+          <p:cNvPr id="47" name="C3-E07 round_rect 45" descr="sci-ppt:o045"/>
+          <p:cNvSpPr/>
+          <p:nvPr/>
+        </p:nvSpPr>
+        <p:spPr>
+          <a:xfrm>
+            <a:off x="7223760" y="1371600"/>
+            <a:ext cx="4617720" cy="3657600"/>
+          </a:xfrm>
+          <a:prstGeom prst="roundRect">
+            <a:avLst/>
+          </a:prstGeom>
+          <a:solidFill>
+            <a:srgbClr val="213E4B"/>
+          </a:solidFill>
+          <a:ln w="20320">
+            <a:solidFill>
+              <a:srgbClr val="8EDBD4"/>
+            </a:solidFill>
+          </a:ln>
+          <a:effectLst/>
+        </p:spPr>
+        <p:txBody>
+          <a:bodyPr rtlCol="0" anchor="ctr"/>
+          <a:lstStyle/>
+          <a:p>
+            <a:pPr algn="ctr"/>
+          </a:p>
+        </p:txBody>
+      </p:sp>
+      <p:sp>
+        <p:nvSpPr>
+          <p:cNvPr id="48" name="C3-E07 text 46" descr="sci-ppt:o046"/>
+          <p:cNvSpPr txBox="1"/>
+          <p:nvPr/>
+        </p:nvSpPr>
+        <p:spPr>
+          <a:xfrm>
+            <a:off x="7333488" y="1426464"/>
+            <a:ext cx="4398264" cy="247142"/>
+          </a:xfrm>
+          <a:prstGeom prst="rect">
+            <a:avLst/>
+          </a:prstGeom>
+          <a:noFill/>
+          <a:effectLst/>
+        </p:spPr>
+        <p:txBody>
+          <a:bodyPr wrap="none" lIns="18288" rIns="18288" tIns="18288" bIns="18288" anchor="t">
+            <a:spAutoFit/>
+          </a:bodyPr>
+          <a:lstStyle/>
+          <a:p>
+            <a:pPr algn="l">
+              <a:spcAft>
+                <a:spcPts val="0"/>
+              </a:spcAft>
+            </a:pPr>
+            <a:r>
+              <a:rPr sz="1300" b="1" i="0">
+                <a:solidFill>
+                  <a:srgbClr val="8EDBD4"/>
+                </a:solidFill>
+                <a:latin typeface="Arial"/>
+              </a:rPr>
+              <a:t>Symmetric constant-pressure control</a:t>
+            </a:r>
+          </a:p>
+        </p:txBody>
+      </p:sp>
+      <p:sp>
+        <p:nvSpPr>
+          <p:cNvPr id="49" name="C3-E07 text 47" descr="sci-ppt:o047"/>
+          <p:cNvSpPr txBox="1"/>
+          <p:nvPr/>
+        </p:nvSpPr>
+        <p:spPr>
+          <a:xfrm>
+            <a:off x="7360920" y="1828800"/>
+            <a:ext cx="4389120" cy="239395"/>
+          </a:xfrm>
+          <a:prstGeom prst="rect">
+            <a:avLst/>
+          </a:prstGeom>
+          <a:noFill/>
+          <a:effectLst/>
+        </p:spPr>
+        <p:txBody>
+          <a:bodyPr wrap="none" lIns="18288" rIns="18288" tIns="18288" bIns="18288" anchor="t">
+            <a:spAutoFit/>
+          </a:bodyPr>
+          <a:lstStyle/>
+          <a:p>
+            <a:pPr algn="l">
+              <a:spcAft>
+                <a:spcPts val="0"/>
+              </a:spcAft>
+            </a:pPr>
+            <a:r>
+              <a:rPr sz="1250" b="1" i="0">
                 <a:solidFill>
                   <a:srgbClr val="E7F0F3"/>
                 </a:solidFill>
                 <a:latin typeface="Arial"/>
               </a:rPr>
-              <a:t>i: receiver</a:t>
-            </a:r>
-          </a:p>
-        </p:txBody>
-      </p:sp>
-      <p:cxnSp>
-        <p:nvCxnSpPr>
-          <p:cNvPr id="7" name="C3-E07 line 5" descr="sci-ppt:o005"/>
-          <p:cNvCxnSpPr/>
+              <a:t>(1 + SR) R R̈ + (3/2 + 2SR) Ṙ² = −Δp_c / ρ</a:t>
+            </a:r>
+          </a:p>
+        </p:txBody>
+      </p:sp>
+      <p:sp>
+        <p:nvSpPr>
+          <p:cNvPr id="50" name="C3-E07 text 48" descr="sci-ppt:o048"/>
+          <p:cNvSpPr txBox="1"/>
           <p:nvPr/>
-        </p:nvCxnSpPr>
-        <p:spPr>
-          <a:xfrm>
-            <a:off x="2194560" y="3108960"/>
-            <a:ext cx="6492240" cy="0"/>
-          </a:xfrm>
-          <a:prstGeom prst="line">
+        </p:nvSpPr>
+        <p:spPr>
+          <a:xfrm>
+            <a:off x="7562088" y="2514600"/>
+            <a:ext cx="4187952" cy="417576"/>
+          </a:xfrm>
+          <a:prstGeom prst="rect">
             <a:avLst/>
           </a:prstGeom>
-          <a:ln w="25400">
+          <a:noFill/>
+          <a:effectLst/>
+        </p:spPr>
+        <p:txBody>
+          <a:bodyPr wrap="none" lIns="18288" rIns="18288" tIns="18288" bIns="18288" anchor="t">
+            <a:spAutoFit/>
+          </a:bodyPr>
+          <a:lstStyle/>
+          <a:p>
+            <a:pPr algn="l">
+              <a:spcAft>
+                <a:spcPts val="0"/>
+              </a:spcAft>
+            </a:pPr>
+            <a:r>
+              <a:rPr sz="1200" b="0" i="0">
+                <a:solidFill>
+                  <a:srgbClr val="E7F0F3"/>
+                </a:solidFill>
+                <a:latin typeface="Arial"/>
+              </a:rPr>
+              <a:t>S = S_N is the reciprocal-distance sum from the</a:t>
+            </a:r>
+          </a:p>
+          <a:p>
+            <a:pPr algn="l">
+              <a:spcAft>
+                <a:spcPts val="0"/>
+              </a:spcAft>
+            </a:pPr>
+            <a:r>
+              <a:rPr sz="1200" b="0" i="0">
+                <a:solidFill>
+                  <a:srgbClr val="E7F0F3"/>
+                </a:solidFill>
+                <a:latin typeface="Arial"/>
+              </a:rPr>
+              <a:t>polygon.</a:t>
+            </a:r>
+          </a:p>
+        </p:txBody>
+      </p:sp>
+      <p:sp>
+        <p:nvSpPr>
+          <p:cNvPr id="51" name="C3-E07 ellipse 49" descr="sci-ppt:o049"/>
+          <p:cNvSpPr/>
+          <p:nvPr/>
+        </p:nvSpPr>
+        <p:spPr>
+          <a:xfrm>
+            <a:off x="7392924" y="2567940"/>
+            <a:ext cx="82296" cy="82296"/>
+          </a:xfrm>
+          <a:prstGeom prst="ellipse">
+            <a:avLst/>
+          </a:prstGeom>
+          <a:solidFill>
+            <a:srgbClr val="8EDBD4"/>
+          </a:solidFill>
+          <a:ln w="12700">
             <a:solidFill>
               <a:srgbClr val="8EDBD4"/>
             </a:solidFill>
           </a:ln>
           <a:effectLst/>
         </p:spPr>
-      </p:cxnSp>
-      <p:sp>
-        <p:nvSpPr>
-          <p:cNvPr id="8" name="C3-E07 text 6" descr="sci-ppt:o006"/>
+        <p:txBody>
+          <a:bodyPr rtlCol="0" anchor="ctr"/>
+          <a:lstStyle/>
+          <a:p>
+            <a:pPr algn="ctr"/>
+          </a:p>
+        </p:txBody>
+      </p:sp>
+      <p:sp>
+        <p:nvSpPr>
+          <p:cNvPr id="52" name="C3-E07 text 50" descr="sci-ppt:o050"/>
           <p:cNvSpPr txBox="1"/>
           <p:nvPr/>
         </p:nvSpPr>
         <p:spPr>
           <a:xfrm>
-            <a:off x="4846320" y="3200400"/>
-            <a:ext cx="1828800" cy="365760"/>
+            <a:off x="7562088" y="2977895"/>
+            <a:ext cx="4187952" cy="231648"/>
           </a:xfrm>
           <a:prstGeom prst="rect">
             <a:avLst/>
@@ -3320,7 +6119,7 @@
           <a:effectLst/>
         </p:spPr>
         <p:txBody>
-          <a:bodyPr wrap="square" lIns="27432" rIns="27432" tIns="18288" bIns="18288" anchor="ctr">
+          <a:bodyPr wrap="none" lIns="18288" rIns="18288" tIns="18288" bIns="18288" anchor="t">
             <a:spAutoFit/>
           </a:bodyPr>
           <a:lstStyle/>
@@ -3331,51 +6130,59 @@
               </a:spcAft>
             </a:pPr>
             <a:r>
-              <a:rPr sz="1700" b="0" i="0">
+              <a:rPr sz="1200" b="0" i="0">
                 <a:solidFill>
                   <a:srgbClr val="E7F0F3"/>
                 </a:solidFill>
                 <a:latin typeface="Arial"/>
               </a:rPr>
-              <a:t>d_ij</a:t>
-            </a:r>
-          </a:p>
-        </p:txBody>
-      </p:sp>
-      <p:cxnSp>
-        <p:nvCxnSpPr>
-          <p:cNvPr id="9" name="C3-E07 arrow 7" descr="sci-ppt:o007"/>
-          <p:cNvCxnSpPr/>
+              <a:t>Start at rest at Rₘₐₓ: R(0) = Rₘₐₓ, Ṙ(0) = 0.</a:t>
+            </a:r>
+          </a:p>
+        </p:txBody>
+      </p:sp>
+      <p:sp>
+        <p:nvSpPr>
+          <p:cNvPr id="53" name="C3-E07 ellipse 51" descr="sci-ppt:o051"/>
+          <p:cNvSpPr/>
           <p:nvPr/>
-        </p:nvCxnSpPr>
-        <p:spPr>
-          <a:xfrm>
-            <a:off x="3108960" y="2057400"/>
-            <a:ext cx="4617719" cy="0"/>
-          </a:xfrm>
-          <a:prstGeom prst="line">
+        </p:nvSpPr>
+        <p:spPr>
+          <a:xfrm>
+            <a:off x="7392924" y="3031236"/>
+            <a:ext cx="82296" cy="82296"/>
+          </a:xfrm>
+          <a:prstGeom prst="ellipse">
             <a:avLst/>
           </a:prstGeom>
-          <a:ln w="25400">
+          <a:solidFill>
+            <a:srgbClr val="8EDBD4"/>
+          </a:solidFill>
+          <a:ln w="12700">
             <a:solidFill>
               <a:srgbClr val="8EDBD4"/>
             </a:solidFill>
-            <a:headEnd type="none" w="med" len="med"/>
-            <a:tailEnd type="triangle" w="med" len="med"/>
           </a:ln>
           <a:effectLst/>
         </p:spPr>
-      </p:cxnSp>
-      <p:sp>
-        <p:nvSpPr>
-          <p:cNvPr id="10" name="C3-E07 text 8" descr="sci-ppt:o008"/>
+        <p:txBody>
+          <a:bodyPr rtlCol="0" anchor="ctr"/>
+          <a:lstStyle/>
+          <a:p>
+            <a:pPr algn="ctr"/>
+          </a:p>
+        </p:txBody>
+      </p:sp>
+      <p:sp>
+        <p:nvSpPr>
+          <p:cNvPr id="54" name="C3-E07 text 52" descr="sci-ppt:o052"/>
           <p:cNvSpPr txBox="1"/>
           <p:nvPr/>
         </p:nvSpPr>
         <p:spPr>
           <a:xfrm>
-            <a:off x="3749039" y="1600200"/>
-            <a:ext cx="3931920" cy="365760"/>
+            <a:off x="7562088" y="3255263"/>
+            <a:ext cx="4187952" cy="417576"/>
           </a:xfrm>
           <a:prstGeom prst="rect">
             <a:avLst/>
@@ -3384,7 +6191,7 @@
           <a:effectLst/>
         </p:spPr>
         <p:txBody>
-          <a:bodyPr wrap="square" lIns="27432" rIns="27432" tIns="18288" bIns="18288" anchor="ctr">
+          <a:bodyPr wrap="none" lIns="18288" rIns="18288" tIns="18288" bIns="18288" anchor="t">
             <a:spAutoFit/>
           </a:bodyPr>
           <a:lstStyle/>
@@ -3395,27 +6202,75 @@
               </a:spcAft>
             </a:pPr>
             <a:r>
-              <a:rPr sz="1800" b="0" i="0">
+              <a:rPr sz="1200" b="0" i="0">
                 <a:solidFill>
                   <a:srgbClr val="E7F0F3"/>
                 </a:solidFill>
                 <a:latin typeface="Arial"/>
               </a:rPr>
-              <a:t>Shared liquid: ρ, p∞</a:t>
-            </a:r>
-          </a:p>
-        </p:txBody>
-      </p:sp>
-      <p:sp>
-        <p:nvSpPr>
-          <p:cNvPr id="11" name="C3-E07 text 9" descr="sci-ppt:o009"/>
+              <a:t>Larger χ means stronger coupling and a later</a:t>
+            </a:r>
+          </a:p>
+          <a:p>
+            <a:pPr algn="l">
+              <a:spcAft>
+                <a:spcPts val="0"/>
+              </a:spcAft>
+            </a:pPr>
+            <a:r>
+              <a:rPr sz="1200" b="0" i="0">
+                <a:solidFill>
+                  <a:srgbClr val="E7F0F3"/>
+                </a:solidFill>
+                <a:latin typeface="Arial"/>
+              </a:rPr>
+              <a:t>collapse.</a:t>
+            </a:r>
+          </a:p>
+        </p:txBody>
+      </p:sp>
+      <p:sp>
+        <p:nvSpPr>
+          <p:cNvPr id="55" name="C3-E07 ellipse 53" descr="sci-ppt:o053"/>
+          <p:cNvSpPr/>
+          <p:nvPr/>
+        </p:nvSpPr>
+        <p:spPr>
+          <a:xfrm>
+            <a:off x="7392924" y="3308604"/>
+            <a:ext cx="82296" cy="82296"/>
+          </a:xfrm>
+          <a:prstGeom prst="ellipse">
+            <a:avLst/>
+          </a:prstGeom>
+          <a:solidFill>
+            <a:srgbClr val="8EDBD4"/>
+          </a:solidFill>
+          <a:ln w="12700">
+            <a:solidFill>
+              <a:srgbClr val="8EDBD4"/>
+            </a:solidFill>
+          </a:ln>
+          <a:effectLst/>
+        </p:spPr>
+        <p:txBody>
+          <a:bodyPr rtlCol="0" anchor="ctr"/>
+          <a:lstStyle/>
+          <a:p>
+            <a:pPr algn="ctr"/>
+          </a:p>
+        </p:txBody>
+      </p:sp>
+      <p:sp>
+        <p:nvSpPr>
+          <p:cNvPr id="56" name="C3-E07 text 54" descr="sci-ppt:o054"/>
           <p:cNvSpPr txBox="1"/>
           <p:nvPr/>
         </p:nvSpPr>
         <p:spPr>
           <a:xfrm>
-            <a:off x="548640" y="777240"/>
-            <a:ext cx="10972800" cy="411480"/>
+            <a:off x="7562088" y="3718560"/>
+            <a:ext cx="4187952" cy="417576"/>
           </a:xfrm>
           <a:prstGeom prst="rect">
             <a:avLst/>
@@ -3424,7 +6279,7 @@
           <a:effectLst/>
         </p:spPr>
         <p:txBody>
-          <a:bodyPr wrap="square" lIns="27432" rIns="27432" tIns="18288" bIns="18288" anchor="ctr">
+          <a:bodyPr wrap="none" lIns="18288" rIns="18288" tIns="18288" bIns="18288" anchor="t">
             <a:spAutoFit/>
           </a:bodyPr>
           <a:lstStyle/>
@@ -3435,75 +6290,75 @@
               </a:spcAft>
             </a:pPr>
             <a:r>
-              <a:rPr sz="1800" b="0" i="0">
+              <a:rPr sz="1200" b="0" i="0">
                 <a:solidFill>
                   <a:srgbClr val="E7F0F3"/>
                 </a:solidFill>
                 <a:latin typeface="Arial"/>
               </a:rPr>
-              <a:t>Fixed centres; spherical cavities; R_i, R_j ≪ d_ij</a:t>
-            </a:r>
-          </a:p>
-        </p:txBody>
-      </p:sp>
-      <p:cxnSp>
-        <p:nvCxnSpPr>
-          <p:cNvPr id="12" name="C3-E07 arrow 10" descr="sci-ppt:o010"/>
-          <p:cNvCxnSpPr/>
+              <a:t>Surface tension and viscosity are omitted in this</a:t>
+            </a:r>
+          </a:p>
+          <a:p>
+            <a:pPr algn="l">
+              <a:spcAft>
+                <a:spcPts val="0"/>
+              </a:spcAft>
+            </a:pPr>
+            <a:r>
+              <a:rPr sz="1200" b="0" i="0">
+                <a:solidFill>
+                  <a:srgbClr val="E7F0F3"/>
+                </a:solidFill>
+                <a:latin typeface="Arial"/>
+              </a:rPr>
+              <a:t>ideal control.</a:t>
+            </a:r>
+          </a:p>
+        </p:txBody>
+      </p:sp>
+      <p:sp>
+        <p:nvSpPr>
+          <p:cNvPr id="57" name="C3-E07 ellipse 55" descr="sci-ppt:o055"/>
+          <p:cNvSpPr/>
           <p:nvPr/>
-        </p:nvCxnSpPr>
-        <p:spPr>
-          <a:xfrm>
-            <a:off x="1051560" y="2057400"/>
-            <a:ext cx="347472" cy="0"/>
-          </a:xfrm>
-          <a:prstGeom prst="line">
+        </p:nvSpPr>
+        <p:spPr>
+          <a:xfrm>
+            <a:off x="7392924" y="3771900"/>
+            <a:ext cx="82296" cy="82296"/>
+          </a:xfrm>
+          <a:prstGeom prst="ellipse">
             <a:avLst/>
           </a:prstGeom>
-          <a:ln w="25400">
+          <a:solidFill>
+            <a:srgbClr val="8EDBD4"/>
+          </a:solidFill>
+          <a:ln w="12700">
             <a:solidFill>
               <a:srgbClr val="8EDBD4"/>
             </a:solidFill>
-            <a:headEnd type="none" w="med" len="med"/>
-            <a:tailEnd type="triangle" w="med" len="med"/>
           </a:ln>
           <a:effectLst/>
         </p:spPr>
-      </p:cxnSp>
-      <p:cxnSp>
-        <p:nvCxnSpPr>
-          <p:cNvPr id="13" name="C3-E07 arrow 11" descr="sci-ppt:o011"/>
-          <p:cNvCxnSpPr/>
-          <p:nvPr/>
-        </p:nvCxnSpPr>
-        <p:spPr>
-          <a:xfrm flipH="1">
-            <a:off x="2990088" y="2057400"/>
-            <a:ext cx="347472" cy="0"/>
-          </a:xfrm>
-          <a:prstGeom prst="line">
-            <a:avLst/>
-          </a:prstGeom>
-          <a:ln w="25400">
-            <a:solidFill>
-              <a:srgbClr val="8EDBD4"/>
-            </a:solidFill>
-            <a:headEnd type="none" w="med" len="med"/>
-            <a:tailEnd type="triangle" w="med" len="med"/>
-          </a:ln>
-          <a:effectLst/>
-        </p:spPr>
-      </p:cxnSp>
-      <p:sp>
-        <p:nvSpPr>
-          <p:cNvPr id="14" name="C3-E07 text 12" descr="sci-ppt:o012"/>
+        <p:txBody>
+          <a:bodyPr rtlCol="0" anchor="ctr"/>
+          <a:lstStyle/>
+          <a:p>
+            <a:pPr algn="ctr"/>
+          </a:p>
+        </p:txBody>
+      </p:sp>
+      <p:sp>
+        <p:nvSpPr>
+          <p:cNvPr id="58" name="C3-E07 text 56" descr="sci-ppt:o056"/>
           <p:cNvSpPr txBox="1"/>
           <p:nvPr/>
         </p:nvSpPr>
         <p:spPr>
           <a:xfrm>
-            <a:off x="3703320" y="2423160"/>
-            <a:ext cx="4114800" cy="457200"/>
+            <a:off x="914400" y="5733288"/>
+            <a:ext cx="10972800" cy="239395"/>
           </a:xfrm>
           <a:prstGeom prst="rect">
             <a:avLst/>
@@ -3512,7 +6367,7 @@
           <a:effectLst/>
         </p:spPr>
         <p:txBody>
-          <a:bodyPr wrap="square" lIns="27432" rIns="27432" tIns="18288" bIns="18288" anchor="ctr">
+          <a:bodyPr wrap="none" lIns="18288" rIns="18288" tIns="18288" bIns="18288" anchor="t">
             <a:spAutoFit/>
           </a:bodyPr>
           <a:lstStyle/>
@@ -3523,27 +6378,27 @@
               </a:spcAft>
             </a:pPr>
             <a:r>
-              <a:rPr sz="1800" b="0" i="0">
+              <a:rPr sz="1250" b="0" i="0">
                 <a:solidFill>
-                  <a:srgbClr val="8EDBD4"/>
+                  <a:srgbClr val="B4C7D2"/>
                 </a:solidFill>
                 <a:latin typeface="Arial"/>
               </a:rPr>
-              <a:t>Collapse branch: Ṙ &lt; 0</a:t>
-            </a:r>
-          </a:p>
-        </p:txBody>
-      </p:sp>
-      <p:sp>
-        <p:nvSpPr>
-          <p:cNvPr id="15" name="C3-E07 text 13" descr="sci-ppt:o013"/>
+              <a:t>Inputs: Rₘₐₓ = 30 µm, ρ = 1000 kg/m³, Δp_c = 100 kPa. Dashed lines mark each collapse time.</a:t>
+            </a:r>
+          </a:p>
+        </p:txBody>
+      </p:sp>
+      <p:sp>
+        <p:nvSpPr>
+          <p:cNvPr id="59" name="C3-E07 text 57" descr="sci-ppt:o057"/>
           <p:cNvSpPr txBox="1"/>
           <p:nvPr/>
         </p:nvSpPr>
         <p:spPr>
           <a:xfrm>
-            <a:off x="731520" y="3611880"/>
-            <a:ext cx="10789920" cy="274320"/>
+            <a:off x="320040" y="6510528"/>
+            <a:ext cx="11521440" cy="200660"/>
           </a:xfrm>
           <a:prstGeom prst="rect">
             <a:avLst/>
@@ -3552,389 +6407,7 @@
           <a:effectLst/>
         </p:spPr>
         <p:txBody>
-          <a:bodyPr wrap="square" lIns="27432" rIns="27432" tIns="18288" bIns="18288" anchor="ctr">
-            <a:spAutoFit/>
-          </a:bodyPr>
-          <a:lstStyle/>
-          <a:p>
-            <a:pPr algn="l">
-              <a:spcAft>
-                <a:spcPts val="0"/>
-              </a:spcAft>
-            </a:pPr>
-            <a:r>
-              <a:rPr sz="1600" b="0" i="0">
-                <a:solidFill>
-                  <a:srgbClr val="E7F0F3"/>
-                </a:solidFill>
-                <a:latin typeface="Arial"/>
-              </a:rPr>
-              <a:t>Interaction increases effective liquid inertia; it adds no source energy.</a:t>
-            </a:r>
-          </a:p>
-        </p:txBody>
-      </p:sp>
-      <p:cxnSp>
-        <p:nvCxnSpPr>
-          <p:cNvPr id="16" name="C3-E07 line 14" descr="sci-ppt:o014"/>
-          <p:cNvCxnSpPr/>
-          <p:nvPr/>
-        </p:nvCxnSpPr>
-        <p:spPr>
-          <a:xfrm>
-            <a:off x="274320" y="3977639"/>
-            <a:ext cx="11612880" cy="0"/>
-          </a:xfrm>
-          <a:prstGeom prst="line">
-            <a:avLst/>
-          </a:prstGeom>
-          <a:ln w="12700">
-            <a:solidFill>
-              <a:srgbClr val="405967"/>
-            </a:solidFill>
-          </a:ln>
-          <a:effectLst/>
-        </p:spPr>
-      </p:cxnSp>
-      <p:sp>
-        <p:nvSpPr>
-          <p:cNvPr id="17" name="C3-E07 text 15" descr="sci-ppt:o015"/>
-          <p:cNvSpPr txBox="1"/>
-          <p:nvPr/>
-        </p:nvSpPr>
-        <p:spPr>
-          <a:xfrm>
-            <a:off x="320040" y="4096512"/>
-            <a:ext cx="5715000" cy="246888"/>
-          </a:xfrm>
-          <a:prstGeom prst="rect">
-            <a:avLst/>
-          </a:prstGeom>
-          <a:noFill/>
-          <a:effectLst/>
-        </p:spPr>
-        <p:txBody>
-          <a:bodyPr wrap="square" lIns="27432" rIns="27432" tIns="18288" bIns="18288" anchor="ctr">
-            <a:spAutoFit/>
-          </a:bodyPr>
-          <a:lstStyle/>
-          <a:p>
-            <a:pPr algn="l">
-              <a:spcAft>
-                <a:spcPts val="0"/>
-              </a:spcAft>
-            </a:pPr>
-            <a:r>
-              <a:rPr sz="1150" b="0" i="0">
-                <a:solidFill>
-                  <a:srgbClr val="B4C7D2"/>
-                </a:solidFill>
-                <a:latin typeface="Arial"/>
-              </a:rPr>
-              <a:t>• R = R_max at t = 0</a:t>
-            </a:r>
-          </a:p>
-        </p:txBody>
-      </p:sp>
-      <p:sp>
-        <p:nvSpPr>
-          <p:cNvPr id="18" name="C3-E07 text 16" descr="sci-ppt:o016"/>
-          <p:cNvSpPr txBox="1"/>
-          <p:nvPr/>
-        </p:nvSpPr>
-        <p:spPr>
-          <a:xfrm>
-            <a:off x="6217920" y="4096512"/>
-            <a:ext cx="5715000" cy="246888"/>
-          </a:xfrm>
-          <a:prstGeom prst="rect">
-            <a:avLst/>
-          </a:prstGeom>
-          <a:noFill/>
-          <a:effectLst/>
-        </p:spPr>
-        <p:txBody>
-          <a:bodyPr wrap="square" lIns="27432" rIns="27432" tIns="18288" bIns="18288" anchor="ctr">
-            <a:spAutoFit/>
-          </a:bodyPr>
-          <a:lstStyle/>
-          <a:p>
-            <a:pPr algn="l">
-              <a:spcAft>
-                <a:spcPts val="0"/>
-              </a:spcAft>
-            </a:pPr>
-            <a:r>
-              <a:rPr sz="1150" b="0" i="0">
-                <a:solidFill>
-                  <a:srgbClr val="B4C7D2"/>
-                </a:solidFill>
-                <a:latin typeface="Arial"/>
-              </a:rPr>
-              <a:t>• Ṙ = 0 initially; R̈ inward</a:t>
-            </a:r>
-          </a:p>
-        </p:txBody>
-      </p:sp>
-      <p:sp>
-        <p:nvSpPr>
-          <p:cNvPr id="19" name="C3-E07 text 17" descr="sci-ppt:o017"/>
-          <p:cNvSpPr txBox="1"/>
-          <p:nvPr/>
-        </p:nvSpPr>
-        <p:spPr>
-          <a:xfrm>
-            <a:off x="320040" y="4329684"/>
-            <a:ext cx="5715000" cy="246888"/>
-          </a:xfrm>
-          <a:prstGeom prst="rect">
-            <a:avLst/>
-          </a:prstGeom>
-          <a:noFill/>
-          <a:effectLst/>
-        </p:spPr>
-        <p:txBody>
-          <a:bodyPr wrap="square" lIns="27432" rIns="27432" tIns="18288" bIns="18288" anchor="ctr">
-            <a:spAutoFit/>
-          </a:bodyPr>
-          <a:lstStyle/>
-          <a:p>
-            <a:pPr algn="l">
-              <a:spcAft>
-                <a:spcPts val="0"/>
-              </a:spcAft>
-            </a:pPr>
-            <a:r>
-              <a:rPr sz="1150" b="0" i="0">
-                <a:solidFill>
-                  <a:srgbClr val="B4C7D2"/>
-                </a:solidFill>
-                <a:latin typeface="Arial"/>
-              </a:rPr>
-              <a:t>• S, S_N neighbor sum</a:t>
-            </a:r>
-          </a:p>
-        </p:txBody>
-      </p:sp>
-      <p:sp>
-        <p:nvSpPr>
-          <p:cNvPr id="20" name="C3-E07 text 18" descr="sci-ppt:o018"/>
-          <p:cNvSpPr txBox="1"/>
-          <p:nvPr/>
-        </p:nvSpPr>
-        <p:spPr>
-          <a:xfrm>
-            <a:off x="6217920" y="4329684"/>
-            <a:ext cx="5715000" cy="246888"/>
-          </a:xfrm>
-          <a:prstGeom prst="rect">
-            <a:avLst/>
-          </a:prstGeom>
-          <a:noFill/>
-          <a:effectLst/>
-        </p:spPr>
-        <p:txBody>
-          <a:bodyPr wrap="square" lIns="27432" rIns="27432" tIns="18288" bIns="18288" anchor="ctr">
-            <a:spAutoFit/>
-          </a:bodyPr>
-          <a:lstStyle/>
-          <a:p>
-            <a:pPr algn="l">
-              <a:spcAft>
-                <a:spcPts val="0"/>
-              </a:spcAft>
-            </a:pPr>
-            <a:r>
-              <a:rPr sz="1150" b="0" i="0">
-                <a:solidFill>
-                  <a:srgbClr val="B4C7D2"/>
-                </a:solidFill>
-                <a:latin typeface="Arial"/>
-              </a:rPr>
-              <a:t>• p_b inside; p∞ outside</a:t>
-            </a:r>
-          </a:p>
-        </p:txBody>
-      </p:sp>
-      <p:sp>
-        <p:nvSpPr>
-          <p:cNvPr id="21" name="C3-E07 text 19" descr="sci-ppt:o019"/>
-          <p:cNvSpPr txBox="1"/>
-          <p:nvPr/>
-        </p:nvSpPr>
-        <p:spPr>
-          <a:xfrm>
-            <a:off x="320040" y="4562856"/>
-            <a:ext cx="5715000" cy="246888"/>
-          </a:xfrm>
-          <a:prstGeom prst="rect">
-            <a:avLst/>
-          </a:prstGeom>
-          <a:noFill/>
-          <a:effectLst/>
-        </p:spPr>
-        <p:txBody>
-          <a:bodyPr wrap="square" lIns="27432" rIns="27432" tIns="18288" bIns="18288" anchor="ctr">
-            <a:spAutoFit/>
-          </a:bodyPr>
-          <a:lstStyle/>
-          <a:p>
-            <a:pPr algn="l">
-              <a:spcAft>
-                <a:spcPts val="0"/>
-              </a:spcAft>
-            </a:pPr>
-            <a:r>
-              <a:rPr sz="1150" b="0" i="0">
-                <a:solidFill>
-                  <a:srgbClr val="B4C7D2"/>
-                </a:solidFill>
-                <a:latin typeface="Arial"/>
-              </a:rPr>
-              <a:t>• Δp_c = p∞ − p_b</a:t>
-            </a:r>
-          </a:p>
-        </p:txBody>
-      </p:sp>
-      <p:sp>
-        <p:nvSpPr>
-          <p:cNvPr id="22" name="C3-E07 text 20" descr="sci-ppt:o020"/>
-          <p:cNvSpPr txBox="1"/>
-          <p:nvPr/>
-        </p:nvSpPr>
-        <p:spPr>
-          <a:xfrm>
-            <a:off x="6217920" y="4562856"/>
-            <a:ext cx="5715000" cy="246888"/>
-          </a:xfrm>
-          <a:prstGeom prst="rect">
-            <a:avLst/>
-          </a:prstGeom>
-          <a:noFill/>
-          <a:effectLst/>
-        </p:spPr>
-        <p:txBody>
-          <a:bodyPr wrap="square" lIns="27432" rIns="27432" tIns="18288" bIns="18288" anchor="ctr">
-            <a:spAutoFit/>
-          </a:bodyPr>
-          <a:lstStyle/>
-          <a:p>
-            <a:pPr algn="l">
-              <a:spcAft>
-                <a:spcPts val="0"/>
-              </a:spcAft>
-            </a:pPr>
-            <a:r>
-              <a:rPr sz="1150" b="0" i="0">
-                <a:solidFill>
-                  <a:srgbClr val="B4C7D2"/>
-                </a:solidFill>
-                <a:latin typeface="Arial"/>
-              </a:rPr>
-              <a:t>• ρ shared liquid; SR dimensionless</a:t>
-            </a:r>
-          </a:p>
-        </p:txBody>
-      </p:sp>
-      <p:sp>
-        <p:nvSpPr>
-          <p:cNvPr id="23" name="C3-E07 text 21" descr="sci-ppt:o021"/>
-          <p:cNvSpPr txBox="1"/>
-          <p:nvPr/>
-        </p:nvSpPr>
-        <p:spPr>
-          <a:xfrm>
-            <a:off x="320040" y="5596128"/>
-            <a:ext cx="11430000" cy="292608"/>
-          </a:xfrm>
-          <a:prstGeom prst="rect">
-            <a:avLst/>
-          </a:prstGeom>
-          <a:noFill/>
-          <a:effectLst/>
-        </p:spPr>
-        <p:txBody>
-          <a:bodyPr wrap="square" lIns="27432" rIns="27432" tIns="18288" bIns="18288" anchor="ctr">
-            <a:spAutoFit/>
-          </a:bodyPr>
-          <a:lstStyle/>
-          <a:p>
-            <a:pPr algn="l">
-              <a:spcAft>
-                <a:spcPts val="0"/>
-              </a:spcAft>
-            </a:pPr>
-            <a:r>
-              <a:rPr sz="1150" b="0" i="0">
-                <a:solidFill>
-                  <a:srgbClr val="8EDBD4"/>
-                </a:solidFill>
-                <a:latin typeface="Arial"/>
-              </a:rPr>
-              <a:t>The shared-liquid inertia factor is 1 + SR</a:t>
-            </a:r>
-          </a:p>
-        </p:txBody>
-      </p:sp>
-      <p:sp>
-        <p:nvSpPr>
-          <p:cNvPr id="24" name="C3-E07 text 22" descr="sci-ppt:o022"/>
-          <p:cNvSpPr txBox="1"/>
-          <p:nvPr/>
-        </p:nvSpPr>
-        <p:spPr>
-          <a:xfrm>
-            <a:off x="320040" y="5870448"/>
-            <a:ext cx="11430000" cy="292608"/>
-          </a:xfrm>
-          <a:prstGeom prst="rect">
-            <a:avLst/>
-          </a:prstGeom>
-          <a:noFill/>
-          <a:effectLst/>
-        </p:spPr>
-        <p:txBody>
-          <a:bodyPr wrap="square" lIns="27432" rIns="27432" tIns="18288" bIns="18288" anchor="ctr">
-            <a:spAutoFit/>
-          </a:bodyPr>
-          <a:lstStyle/>
-          <a:p>
-            <a:pPr algn="l">
-              <a:spcAft>
-                <a:spcPts val="0"/>
-              </a:spcAft>
-            </a:pPr>
-            <a:r>
-              <a:rPr sz="1150" b="0" i="0">
-                <a:solidFill>
-                  <a:srgbClr val="8EDBD4"/>
-                </a:solidFill>
-                <a:latin typeface="Arial"/>
-              </a:rPr>
-              <a:t>This is a constrained radial control, not a jet simulation</a:t>
-            </a:r>
-          </a:p>
-        </p:txBody>
-      </p:sp>
-      <p:sp>
-        <p:nvSpPr>
-          <p:cNvPr id="25" name="C3-E07 text 23" descr="sci-ppt:o023"/>
-          <p:cNvSpPr txBox="1"/>
-          <p:nvPr/>
-        </p:nvSpPr>
-        <p:spPr>
-          <a:xfrm>
-            <a:off x="320040" y="6473952"/>
-            <a:ext cx="11430000" cy="256032"/>
-          </a:xfrm>
-          <a:prstGeom prst="rect">
-            <a:avLst/>
-          </a:prstGeom>
-          <a:noFill/>
-          <a:effectLst/>
-        </p:spPr>
-        <p:txBody>
-          <a:bodyPr wrap="square" lIns="27432" rIns="27432" tIns="18288" bIns="18288" anchor="ctr">
+          <a:bodyPr wrap="none" lIns="18288" rIns="18288" tIns="18288" bIns="18288" anchor="t">
             <a:spAutoFit/>
           </a:bodyPr>
           <a:lstStyle/>
@@ -3951,7 +6424,7 @@
                 </a:solidFill>
                 <a:latin typeface="Arial"/>
               </a:rPr>
-              <a:t>Model schematic; geometry is not to scale.</a:t>
+              <a:t>Numerical integration of Eq. C3-E07.</a:t>
             </a:r>
           </a:p>
         </p:txBody>
